--- a/Дневной лимит.pptx
+++ b/Дневной лимит.pptx
@@ -6962,14 +6962,14 @@
                 <a:solidFill>
                   <a:srgbClr val="16202E"/>
                 </a:solidFill>
-                <a:latin typeface="Rubik"/>
+                <a:latin typeface="Arial Black" panose="020B0A04020102020204" pitchFamily="34" charset="0"/>
                 <a:ea typeface="Rubik" pitchFamily="34" charset="-122"/>
                 <a:cs typeface="Rubik" pitchFamily="34" charset="-120"/>
               </a:rPr>
               <a:t>+0,5 млн ₽</a:t>
             </a:r>
             <a:endParaRPr lang="en-US" sz="3200" dirty="0">
-              <a:latin typeface="Rubik"/>
+              <a:latin typeface="Arial Black" panose="020B0A04020102020204" pitchFamily="34" charset="0"/>
             </a:endParaRPr>
           </a:p>
         </p:txBody>
@@ -7126,13 +7126,14 @@
                 <a:solidFill>
                   <a:srgbClr val="B25A06"/>
                 </a:solidFill>
-                <a:latin typeface="Rubik" pitchFamily="34" charset="0"/>
+                <a:latin typeface="Arial Black" panose="020B0A04020102020204" pitchFamily="34" charset="0"/>
                 <a:ea typeface="Rubik"/>
                 <a:cs typeface="Rubik" pitchFamily="34" charset="-120"/>
               </a:rPr>
               <a:t>+3,7 млн ₽</a:t>
             </a:r>
             <a:endParaRPr lang="en-US" sz="3200" dirty="0">
+              <a:latin typeface="Arial Black" panose="020B0A04020102020204" pitchFamily="34" charset="0"/>
               <a:ea typeface="Rubik"/>
             </a:endParaRPr>
           </a:p>
@@ -7290,14 +7291,14 @@
                 <a:solidFill>
                   <a:srgbClr val="16202E"/>
                 </a:solidFill>
-                <a:latin typeface="Rubik"/>
+                <a:latin typeface="Arial Black" panose="020B0A04020102020204" pitchFamily="34" charset="0"/>
                 <a:ea typeface="Rubik"/>
                 <a:cs typeface="Rubik" pitchFamily="34" charset="-120"/>
               </a:rPr>
               <a:t>+7,7 млн ₽</a:t>
             </a:r>
             <a:endParaRPr lang="en-US" sz="3200" dirty="0">
-              <a:latin typeface="Rubik"/>
+              <a:latin typeface="Arial Black" panose="020B0A04020102020204" pitchFamily="34" charset="0"/>
               <a:ea typeface="Rubik"/>
             </a:endParaRPr>
           </a:p>
@@ -7666,7 +7667,7 @@
                 <a:ea typeface="Cambria" panose="02040503050406030204" pitchFamily="18" charset="0"/>
                 <a:cs typeface="IBM Plex Sans" pitchFamily="34" charset="-120"/>
               </a:rPr>
-              <a:t> —-2 млн ₽</a:t>
+              <a:t> -2 млн ₽</a:t>
             </a:r>
             <a:endParaRPr lang="en-US" sz="1400" dirty="0">
               <a:latin typeface="Cambria" panose="02040503050406030204" pitchFamily="18" charset="0"/>

--- a/Дневной лимит.pptx
+++ b/Дневной лимит.pptx
@@ -1426,13 +1426,16 @@
                 <a:solidFill>
                   <a:srgbClr val="4A5566"/>
                 </a:solidFill>
-                <a:latin typeface="IBM Plex Sans" pitchFamily="34" charset="0"/>
+                <a:latin typeface="Times New Roman" panose="02020603050405020304" pitchFamily="18" charset="0"/>
                 <a:ea typeface="IBM Plex Sans" pitchFamily="34" charset="-122"/>
-                <a:cs typeface="IBM Plex Sans" pitchFamily="34" charset="-120"/>
+                <a:cs typeface="Times New Roman" panose="02020603050405020304" pitchFamily="18" charset="0"/>
               </a:rPr>
               <a:t>Сегодня можно потратить</a:t>
             </a:r>
-            <a:endParaRPr lang="en-US" sz="1400" dirty="0"/>
+            <a:endParaRPr lang="en-US" sz="1400" dirty="0">
+              <a:latin typeface="Times New Roman" panose="02020603050405020304" pitchFamily="18" charset="0"/>
+              <a:cs typeface="Times New Roman" panose="02020603050405020304" pitchFamily="18" charset="0"/>
+            </a:endParaRPr>
           </a:p>
         </p:txBody>
       </p:sp>
@@ -1503,24 +1506,41 @@
           </a:bodyPr>
           <a:lstStyle/>
           <a:p>
-            <a:pPr marL="0" indent="0" algn="l">
+            <a:pPr>
               <a:lnSpc>
                 <a:spcPts val="1960"/>
               </a:lnSpc>
-              <a:buNone/>
             </a:pPr>
             <a:r>
               <a:rPr lang="en-US" sz="1400" dirty="0">
                 <a:solidFill>
                   <a:srgbClr val="4A5566"/>
                 </a:solidFill>
-                <a:latin typeface="IBM Plex Sans" pitchFamily="34" charset="0"/>
+                <a:latin typeface="Times New Roman" panose="02020603050405020304" pitchFamily="18" charset="0"/>
                 <a:ea typeface="IBM Plex Sans" pitchFamily="34" charset="-122"/>
-                <a:cs typeface="IBM Plex Sans" pitchFamily="34" charset="-120"/>
-              </a:rPr>
-              <a:t>до стипендии 14 дней</a:t>
-            </a:r>
-            <a:endParaRPr lang="en-US" sz="1400" dirty="0"/>
+                <a:cs typeface="Times New Roman" panose="02020603050405020304" pitchFamily="18" charset="0"/>
+              </a:rPr>
+              <a:t>до стипендии 14 </a:t>
+            </a:r>
+            <a:r>
+              <a:rPr lang="en-US" sz="1400" dirty="0" err="1">
+                <a:solidFill>
+                  <a:srgbClr val="4A5566"/>
+                </a:solidFill>
+                <a:latin typeface="Times New Roman" panose="02020603050405020304" pitchFamily="18" charset="0"/>
+                <a:ea typeface="IBM Plex Sans" pitchFamily="34" charset="-122"/>
+                <a:cs typeface="Times New Roman" panose="02020603050405020304" pitchFamily="18" charset="0"/>
+              </a:rPr>
+              <a:t>дней</a:t>
+            </a:r>
+            <a:endParaRPr lang="en-US" sz="1400" dirty="0">
+              <a:solidFill>
+                <a:srgbClr val="4A5566"/>
+              </a:solidFill>
+              <a:latin typeface="Times New Roman" panose="02020603050405020304" pitchFamily="18" charset="0"/>
+              <a:ea typeface="IBM Plex Sans" pitchFamily="34" charset="-122"/>
+              <a:cs typeface="Times New Roman" panose="02020603050405020304" pitchFamily="18" charset="0"/>
+            </a:endParaRPr>
           </a:p>
         </p:txBody>
       </p:sp>
@@ -1792,17 +1812,86 @@
               <a:buNone/>
             </a:pPr>
             <a:r>
+              <a:rPr lang="en-US" sz="3600" b="1" dirty="0" err="1">
+                <a:solidFill>
+                  <a:srgbClr val="16202E"/>
+                </a:solidFill>
+                <a:latin typeface="Times New Roman" panose="02020603050405020304" pitchFamily="18" charset="0"/>
+                <a:ea typeface="Rubik" pitchFamily="34" charset="-122"/>
+                <a:cs typeface="Times New Roman" panose="02020603050405020304" pitchFamily="18" charset="0"/>
+              </a:rPr>
+              <a:t>Деньги</a:t>
+            </a:r>
+            <a:r>
               <a:rPr lang="en-US" sz="3600" b="1" dirty="0">
                 <a:solidFill>
                   <a:srgbClr val="16202E"/>
                 </a:solidFill>
-                <a:latin typeface="Rubik" pitchFamily="34" charset="0"/>
+                <a:latin typeface="Times New Roman" panose="02020603050405020304" pitchFamily="18" charset="0"/>
                 <a:ea typeface="Rubik" pitchFamily="34" charset="-122"/>
-                <a:cs typeface="Rubik" pitchFamily="34" charset="-120"/>
-              </a:rPr>
-              <a:t>Деньги кончаются до стипендии</a:t>
-            </a:r>
-            <a:endParaRPr lang="en-US" sz="3600" dirty="0"/>
+                <a:cs typeface="Times New Roman" panose="02020603050405020304" pitchFamily="18" charset="0"/>
+              </a:rPr>
+              <a:t> </a:t>
+            </a:r>
+            <a:r>
+              <a:rPr lang="en-US" sz="3600" b="1" dirty="0" err="1">
+                <a:solidFill>
+                  <a:srgbClr val="16202E"/>
+                </a:solidFill>
+                <a:latin typeface="Times New Roman" panose="02020603050405020304" pitchFamily="18" charset="0"/>
+                <a:ea typeface="Rubik" pitchFamily="34" charset="-122"/>
+                <a:cs typeface="Times New Roman" panose="02020603050405020304" pitchFamily="18" charset="0"/>
+              </a:rPr>
+              <a:t>кончаются</a:t>
+            </a:r>
+            <a:r>
+              <a:rPr lang="en-US" sz="3600" b="1" dirty="0">
+                <a:solidFill>
+                  <a:srgbClr val="16202E"/>
+                </a:solidFill>
+                <a:latin typeface="Times New Roman" panose="02020603050405020304" pitchFamily="18" charset="0"/>
+                <a:ea typeface="Rubik" pitchFamily="34" charset="-122"/>
+                <a:cs typeface="Times New Roman" panose="02020603050405020304" pitchFamily="18" charset="0"/>
+              </a:rPr>
+              <a:t> </a:t>
+            </a:r>
+            <a:r>
+              <a:rPr lang="en-US" sz="3600" b="1" dirty="0" err="1">
+                <a:solidFill>
+                  <a:srgbClr val="16202E"/>
+                </a:solidFill>
+                <a:latin typeface="Times New Roman" panose="02020603050405020304" pitchFamily="18" charset="0"/>
+                <a:ea typeface="Rubik" pitchFamily="34" charset="-122"/>
+                <a:cs typeface="Times New Roman" panose="02020603050405020304" pitchFamily="18" charset="0"/>
+              </a:rPr>
+              <a:t>до</a:t>
+            </a:r>
+            <a:r>
+              <a:rPr lang="en-US" sz="3600" b="1" dirty="0">
+                <a:solidFill>
+                  <a:srgbClr val="16202E"/>
+                </a:solidFill>
+                <a:latin typeface="Times New Roman" panose="02020603050405020304" pitchFamily="18" charset="0"/>
+                <a:ea typeface="Rubik" pitchFamily="34" charset="-122"/>
+                <a:cs typeface="Times New Roman" panose="02020603050405020304" pitchFamily="18" charset="0"/>
+              </a:rPr>
+              <a:t> </a:t>
+            </a:r>
+            <a:r>
+              <a:rPr lang="en-US" sz="3600" b="1" dirty="0" err="1">
+                <a:solidFill>
+                  <a:srgbClr val="16202E"/>
+                </a:solidFill>
+                <a:latin typeface="Times New Roman" panose="02020603050405020304" pitchFamily="18" charset="0"/>
+                <a:ea typeface="Rubik" pitchFamily="34" charset="-122"/>
+                <a:cs typeface="Times New Roman" panose="02020603050405020304" pitchFamily="18" charset="0"/>
+              </a:rPr>
+              <a:t>стипендии</a:t>
+            </a:r>
+            <a:endParaRPr lang="en-US" sz="3600" dirty="0">
+              <a:latin typeface="Times New Roman" panose="02020603050405020304" pitchFamily="18" charset="0"/>
+              <a:cs typeface="Times New Roman" panose="02020603050405020304" pitchFamily="18" charset="0"/>
+            </a:endParaRPr>
           </a:p>
         </p:txBody>
       </p:sp>
@@ -1867,14 +1956,15 @@
                 <a:solidFill>
                   <a:srgbClr val="B25A06"/>
                 </a:solidFill>
-                <a:latin typeface="Rubik"/>
+                <a:latin typeface="Times New Roman" panose="02020603050405020304" pitchFamily="18" charset="0"/>
                 <a:ea typeface="IBM Plex Sans" pitchFamily="34" charset="-122"/>
-                <a:cs typeface="IBM Plex Sans" pitchFamily="34" charset="-120"/>
+                <a:cs typeface="Times New Roman" panose="02020603050405020304" pitchFamily="18" charset="0"/>
               </a:rPr>
               <a:t>КТО ПОЛЬЗОВАТЕЛЬ</a:t>
             </a:r>
             <a:endParaRPr lang="en-US" sz="1600" dirty="0">
-              <a:latin typeface="Rubik"/>
+              <a:latin typeface="Times New Roman" panose="02020603050405020304" pitchFamily="18" charset="0"/>
+              <a:cs typeface="Times New Roman" panose="02020603050405020304" pitchFamily="18" charset="0"/>
             </a:endParaRPr>
           </a:p>
         </p:txBody>
@@ -3691,7 +3781,7 @@
         <p:spPr>
           <a:xfrm>
             <a:off x="1021080" y="2067561"/>
-            <a:ext cx="1862735" cy="513080"/>
+            <a:ext cx="1967510" cy="513080"/>
           </a:xfrm>
           <a:prstGeom prst="rect">
             <a:avLst/>
@@ -3716,13 +3806,16 @@
                 <a:solidFill>
                   <a:srgbClr val="16202E"/>
                 </a:solidFill>
-                <a:latin typeface="IBM Plex Sans" pitchFamily="34" charset="0"/>
-                <a:ea typeface="Cambria" panose="02040503050406030204" pitchFamily="18" charset="0"/>
-                <a:cs typeface="IBM Plex Sans" pitchFamily="34" charset="-120"/>
+                <a:latin typeface="Times New Roman" panose="02020603050405020304" pitchFamily="18" charset="0"/>
+                <a:ea typeface="Cambria" panose="02040503050406030204" pitchFamily="18" charset="0"/>
+                <a:cs typeface="Times New Roman" panose="02020603050405020304" pitchFamily="18" charset="0"/>
               </a:rPr>
               <a:t>Обычными словами</a:t>
             </a:r>
-            <a:endParaRPr lang="en-US" sz="1600" dirty="0"/>
+            <a:endParaRPr lang="en-US" sz="1600" dirty="0">
+              <a:latin typeface="Times New Roman" panose="02020603050405020304" pitchFamily="18" charset="0"/>
+              <a:cs typeface="Times New Roman" panose="02020603050405020304" pitchFamily="18" charset="0"/>
+            </a:endParaRPr>
           </a:p>
         </p:txBody>
       </p:sp>
@@ -3903,13 +3996,16 @@
                 <a:solidFill>
                   <a:srgbClr val="16202E"/>
                 </a:solidFill>
-                <a:latin typeface="IBM Plex Sans" pitchFamily="34" charset="0"/>
-                <a:ea typeface="Cambria" panose="02040503050406030204" pitchFamily="18" charset="0"/>
-                <a:cs typeface="IBM Plex Sans" pitchFamily="34" charset="-120"/>
+                <a:latin typeface="Times New Roman" panose="02020603050405020304" pitchFamily="18" charset="0"/>
+                <a:ea typeface="Cambria" panose="02040503050406030204" pitchFamily="18" charset="0"/>
+                <a:cs typeface="Times New Roman" panose="02020603050405020304" pitchFamily="18" charset="0"/>
               </a:rPr>
               <a:t>Выбирает расчёт</a:t>
             </a:r>
-            <a:endParaRPr lang="en-US" sz="1600" dirty="0"/>
+            <a:endParaRPr lang="en-US" sz="1600" dirty="0">
+              <a:latin typeface="Times New Roman" panose="02020603050405020304" pitchFamily="18" charset="0"/>
+              <a:cs typeface="Times New Roman" panose="02020603050405020304" pitchFamily="18" charset="0"/>
+            </a:endParaRPr>
           </a:p>
         </p:txBody>
       </p:sp>
@@ -4085,13 +4181,16 @@
                 <a:solidFill>
                   <a:srgbClr val="F4F1EA"/>
                 </a:solidFill>
-                <a:latin typeface="IBM Plex Sans" pitchFamily="34" charset="0"/>
-                <a:ea typeface="Cambria" panose="02040503050406030204" pitchFamily="18" charset="0"/>
-                <a:cs typeface="IBM Plex Sans" pitchFamily="34" charset="-120"/>
+                <a:latin typeface="Times New Roman" panose="02020603050405020304" pitchFamily="18" charset="0"/>
+                <a:ea typeface="Cambria" panose="02040503050406030204" pitchFamily="18" charset="0"/>
+                <a:cs typeface="Times New Roman" panose="02020603050405020304" pitchFamily="18" charset="0"/>
               </a:rPr>
               <a:t>Считает точно</a:t>
             </a:r>
-            <a:endParaRPr lang="en-US" sz="1600" dirty="0"/>
+            <a:endParaRPr lang="en-US" sz="1600" dirty="0">
+              <a:latin typeface="Times New Roman" panose="02020603050405020304" pitchFamily="18" charset="0"/>
+              <a:cs typeface="Times New Roman" panose="02020603050405020304" pitchFamily="18" charset="0"/>
+            </a:endParaRPr>
           </a:p>
         </p:txBody>
       </p:sp>
@@ -4431,13 +4530,16 @@
                 <a:solidFill>
                   <a:srgbClr val="4A5566"/>
                 </a:solidFill>
-                <a:latin typeface="IBM Plex Sans" pitchFamily="34" charset="0"/>
+                <a:latin typeface="Times New Roman" panose="02020603050405020304" pitchFamily="18" charset="0"/>
                 <a:ea typeface="IBM Plex Sans" pitchFamily="34" charset="-122"/>
-                <a:cs typeface="IBM Plex Sans" pitchFamily="34" charset="-120"/>
+                <a:cs typeface="Times New Roman" panose="02020603050405020304" pitchFamily="18" charset="0"/>
               </a:rPr>
               <a:t>Подработка учитывается, только когда пришла. Не хватает на платежи — лимит 0 и сразу виден дефицит.</a:t>
             </a:r>
-            <a:endParaRPr lang="en-US" sz="1600" dirty="0"/>
+            <a:endParaRPr lang="en-US" sz="1600" dirty="0">
+              <a:latin typeface="Times New Roman" panose="02020603050405020304" pitchFamily="18" charset="0"/>
+              <a:cs typeface="Times New Roman" panose="02020603050405020304" pitchFamily="18" charset="0"/>
+            </a:endParaRPr>
           </a:p>
         </p:txBody>
       </p:sp>
@@ -5426,13 +5528,16 @@
                 <a:solidFill>
                   <a:srgbClr val="5F6877"/>
                 </a:solidFill>
-                <a:latin typeface="IBM Plex Sans" pitchFamily="34" charset="0"/>
-                <a:ea typeface="Cambria" panose="02040503050406030204" pitchFamily="18" charset="0"/>
-                <a:cs typeface="IBM Plex Sans" pitchFamily="34" charset="-120"/>
+                <a:latin typeface="Times New Roman" panose="02020603050405020304" pitchFamily="18" charset="0"/>
+                <a:ea typeface="Cambria" panose="02040503050406030204" pitchFamily="18" charset="0"/>
+                <a:cs typeface="Times New Roman" panose="02020603050405020304" pitchFamily="18" charset="0"/>
               </a:rPr>
               <a:t>Т-Банк, Сбер, Альфа</a:t>
             </a:r>
-            <a:endParaRPr lang="en-US" sz="1300" dirty="0"/>
+            <a:endParaRPr lang="en-US" sz="1300" dirty="0">
+              <a:latin typeface="Times New Roman" panose="02020603050405020304" pitchFamily="18" charset="0"/>
+              <a:cs typeface="Times New Roman" panose="02020603050405020304" pitchFamily="18" charset="0"/>
+            </a:endParaRPr>
           </a:p>
         </p:txBody>
       </p:sp>
@@ -5516,13 +5621,16 @@
                 <a:solidFill>
                   <a:srgbClr val="16202E"/>
                 </a:solidFill>
-                <a:latin typeface="IBM Plex Sans" pitchFamily="34" charset="0"/>
-                <a:ea typeface="Cambria" panose="02040503050406030204" pitchFamily="18" charset="0"/>
-                <a:cs typeface="IBM Plex Sans" pitchFamily="34" charset="-120"/>
+                <a:latin typeface="Times New Roman" panose="02020603050405020304" pitchFamily="18" charset="0"/>
+                <a:ea typeface="Cambria" panose="02040503050406030204" pitchFamily="18" charset="0"/>
+                <a:cs typeface="Times New Roman" panose="02020603050405020304" pitchFamily="18" charset="0"/>
               </a:rPr>
               <a:t>«Куда ушли деньги?»</a:t>
             </a:r>
-            <a:endParaRPr lang="en-US" sz="1300" dirty="0"/>
+            <a:endParaRPr lang="en-US" sz="1300" dirty="0">
+              <a:latin typeface="Times New Roman" panose="02020603050405020304" pitchFamily="18" charset="0"/>
+              <a:cs typeface="Times New Roman" panose="02020603050405020304" pitchFamily="18" charset="0"/>
+            </a:endParaRPr>
           </a:p>
         </p:txBody>
       </p:sp>
@@ -5726,13 +5834,16 @@
                 <a:solidFill>
                   <a:srgbClr val="5F6877"/>
                 </a:solidFill>
-                <a:latin typeface="IBM Plex Sans" pitchFamily="34" charset="0"/>
-                <a:ea typeface="Cambria" panose="02040503050406030204" pitchFamily="18" charset="0"/>
-                <a:cs typeface="IBM Plex Sans" pitchFamily="34" charset="-120"/>
+                <a:latin typeface="Times New Roman" panose="02020603050405020304" pitchFamily="18" charset="0"/>
+                <a:ea typeface="Cambria" panose="02040503050406030204" pitchFamily="18" charset="0"/>
+                <a:cs typeface="Times New Roman" panose="02020603050405020304" pitchFamily="18" charset="0"/>
               </a:rPr>
               <a:t>Дзен-мани, CoinKeeper</a:t>
             </a:r>
-            <a:endParaRPr lang="en-US" sz="1300" dirty="0"/>
+            <a:endParaRPr lang="en-US" sz="1300" dirty="0">
+              <a:latin typeface="Times New Roman" panose="02020603050405020304" pitchFamily="18" charset="0"/>
+              <a:cs typeface="Times New Roman" panose="02020603050405020304" pitchFamily="18" charset="0"/>
+            </a:endParaRPr>
           </a:p>
         </p:txBody>
       </p:sp>
@@ -5816,13 +5927,16 @@
                 <a:solidFill>
                   <a:srgbClr val="16202E"/>
                 </a:solidFill>
-                <a:latin typeface="IBM Plex Sans" pitchFamily="34" charset="0"/>
-                <a:ea typeface="Cambria" panose="02040503050406030204" pitchFamily="18" charset="0"/>
-                <a:cs typeface="IBM Plex Sans" pitchFamily="34" charset="-120"/>
+                <a:latin typeface="Times New Roman" panose="02020603050405020304" pitchFamily="18" charset="0"/>
+                <a:ea typeface="Cambria" panose="02040503050406030204" pitchFamily="18" charset="0"/>
+                <a:cs typeface="Times New Roman" panose="02020603050405020304" pitchFamily="18" charset="0"/>
               </a:rPr>
               <a:t>«Сколько я потратил по категориям?»</a:t>
             </a:r>
-            <a:endParaRPr lang="en-US" sz="1300" dirty="0"/>
+            <a:endParaRPr lang="en-US" sz="1300" dirty="0">
+              <a:latin typeface="Times New Roman" panose="02020603050405020304" pitchFamily="18" charset="0"/>
+              <a:cs typeface="Times New Roman" panose="02020603050405020304" pitchFamily="18" charset="0"/>
+            </a:endParaRPr>
           </a:p>
         </p:txBody>
       </p:sp>
@@ -6081,13 +6195,16 @@
                 <a:solidFill>
                   <a:srgbClr val="5F6877"/>
                 </a:solidFill>
-                <a:latin typeface="IBM Plex Sans" pitchFamily="34" charset="0"/>
-                <a:ea typeface="Cambria" panose="02040503050406030204" pitchFamily="18" charset="0"/>
-                <a:cs typeface="IBM Plex Sans" pitchFamily="34" charset="-120"/>
+                <a:latin typeface="Times New Roman" panose="02020603050405020304" pitchFamily="18" charset="0"/>
+                <a:ea typeface="Cambria" panose="02040503050406030204" pitchFamily="18" charset="0"/>
+                <a:cs typeface="Times New Roman" panose="02020603050405020304" pitchFamily="18" charset="0"/>
               </a:rPr>
               <a:t>общего назначения</a:t>
             </a:r>
-            <a:endParaRPr lang="en-US" sz="1300" dirty="0"/>
+            <a:endParaRPr lang="en-US" sz="1300" dirty="0">
+              <a:latin typeface="Times New Roman" panose="02020603050405020304" pitchFamily="18" charset="0"/>
+              <a:cs typeface="Times New Roman" panose="02020603050405020304" pitchFamily="18" charset="0"/>
+            </a:endParaRPr>
           </a:p>
         </p:txBody>
       </p:sp>
@@ -6171,13 +6288,16 @@
                 <a:solidFill>
                   <a:srgbClr val="16202E"/>
                 </a:solidFill>
-                <a:latin typeface="IBM Plex Sans" pitchFamily="34" charset="0"/>
-                <a:ea typeface="Cambria" panose="02040503050406030204" pitchFamily="18" charset="0"/>
-                <a:cs typeface="IBM Plex Sans" pitchFamily="34" charset="-120"/>
+                <a:latin typeface="Times New Roman" panose="02020603050405020304" pitchFamily="18" charset="0"/>
+                <a:ea typeface="Cambria" panose="02040503050406030204" pitchFamily="18" charset="0"/>
+                <a:cs typeface="Times New Roman" panose="02020603050405020304" pitchFamily="18" charset="0"/>
               </a:rPr>
               <a:t>«Что посоветуешь?»</a:t>
             </a:r>
-            <a:endParaRPr lang="en-US" sz="1300" dirty="0"/>
+            <a:endParaRPr lang="en-US" sz="1300" dirty="0">
+              <a:latin typeface="Times New Roman" panose="02020603050405020304" pitchFamily="18" charset="0"/>
+              <a:cs typeface="Times New Roman" panose="02020603050405020304" pitchFamily="18" charset="0"/>
+            </a:endParaRPr>
           </a:p>
         </p:txBody>
       </p:sp>
@@ -6425,13 +6545,16 @@
                 <a:solidFill>
                   <a:srgbClr val="5F6877"/>
                 </a:solidFill>
-                <a:latin typeface="IBM Plex Sans" pitchFamily="34" charset="0"/>
-                <a:ea typeface="Cambria" panose="02040503050406030204" pitchFamily="18" charset="0"/>
-                <a:cs typeface="IBM Plex Sans" pitchFamily="34" charset="-120"/>
+                <a:latin typeface="Times New Roman" panose="02020603050405020304" pitchFamily="18" charset="0"/>
+                <a:ea typeface="Cambria" panose="02040503050406030204" pitchFamily="18" charset="0"/>
+                <a:cs typeface="Times New Roman" panose="02020603050405020304" pitchFamily="18" charset="0"/>
               </a:rPr>
               <a:t>наш продукт</a:t>
             </a:r>
-            <a:endParaRPr lang="en-US" sz="1300" dirty="0"/>
+            <a:endParaRPr lang="en-US" sz="1300" dirty="0">
+              <a:latin typeface="Times New Roman" panose="02020603050405020304" pitchFamily="18" charset="0"/>
+              <a:cs typeface="Times New Roman" panose="02020603050405020304" pitchFamily="18" charset="0"/>
+            </a:endParaRPr>
           </a:p>
         </p:txBody>
       </p:sp>
@@ -6515,13 +6638,16 @@
                 <a:solidFill>
                   <a:srgbClr val="16202E"/>
                 </a:solidFill>
-                <a:latin typeface="IBM Plex Sans" pitchFamily="34" charset="0"/>
-                <a:ea typeface="Cambria" panose="02040503050406030204" pitchFamily="18" charset="0"/>
-                <a:cs typeface="IBM Plex Sans" pitchFamily="34" charset="-120"/>
+                <a:latin typeface="Times New Roman" panose="02020603050405020304" pitchFamily="18" charset="0"/>
+                <a:ea typeface="Cambria" panose="02040503050406030204" pitchFamily="18" charset="0"/>
+                <a:cs typeface="Times New Roman" panose="02020603050405020304" pitchFamily="18" charset="0"/>
               </a:rPr>
               <a:t>«Сколько можно потратить сегодня?»</a:t>
             </a:r>
-            <a:endParaRPr lang="en-US" sz="1300" dirty="0"/>
+            <a:endParaRPr lang="en-US" sz="1300" dirty="0">
+              <a:latin typeface="Times New Roman" panose="02020603050405020304" pitchFamily="18" charset="0"/>
+              <a:cs typeface="Times New Roman" panose="02020603050405020304" pitchFamily="18" charset="0"/>
+            </a:endParaRPr>
           </a:p>
         </p:txBody>
       </p:sp>
@@ -8549,13 +8675,16 @@
                 <a:solidFill>
                   <a:srgbClr val="16202E"/>
                 </a:solidFill>
-                <a:latin typeface="Rubik" pitchFamily="34" charset="0"/>
+                <a:latin typeface="Times New Roman" panose="02020603050405020304" pitchFamily="18" charset="0"/>
                 <a:ea typeface="Rubik" pitchFamily="34" charset="-122"/>
-                <a:cs typeface="Rubik" pitchFamily="34" charset="-120"/>
+                <a:cs typeface="Times New Roman" panose="02020603050405020304" pitchFamily="18" charset="0"/>
               </a:rPr>
               <a:t>Итог</a:t>
             </a:r>
-            <a:endParaRPr lang="en-US" sz="3600" dirty="0"/>
+            <a:endParaRPr lang="en-US" sz="3600" dirty="0">
+              <a:latin typeface="Times New Roman" panose="02020603050405020304" pitchFamily="18" charset="0"/>
+              <a:cs typeface="Times New Roman" panose="02020603050405020304" pitchFamily="18" charset="0"/>
+            </a:endParaRPr>
           </a:p>
         </p:txBody>
       </p:sp>

--- a/Дневной лимит.pptx
+++ b/Дневной лимит.pptx
@@ -5,7 +5,7 @@
     <p:sldMasterId id="2147483648" r:id="rId1"/>
   </p:sldMasterIdLst>
   <p:notesMasterIdLst>
-    <p:notesMasterId r:id="rId11"/>
+    <p:notesMasterId r:id="rId13"/>
   </p:notesMasterIdLst>
   <p:sldIdLst>
     <p:sldId id="256" r:id="rId2"/>
@@ -13,10 +13,12 @@
     <p:sldId id="258" r:id="rId4"/>
     <p:sldId id="259" r:id="rId5"/>
     <p:sldId id="260" r:id="rId6"/>
-    <p:sldId id="261" r:id="rId7"/>
-    <p:sldId id="262" r:id="rId8"/>
-    <p:sldId id="263" r:id="rId9"/>
-    <p:sldId id="264" r:id="rId10"/>
+    <p:sldId id="265" r:id="rId7"/>
+    <p:sldId id="266" r:id="rId8"/>
+    <p:sldId id="261" r:id="rId9"/>
+    <p:sldId id="262" r:id="rId10"/>
+    <p:sldId id="263" r:id="rId11"/>
+    <p:sldId id="264" r:id="rId12"/>
   </p:sldIdLst>
   <p:sldSz cx="12192000" cy="6858000"/>
   <p:notesSz cx="6858000" cy="12192000"/>
@@ -332,6 +334,180 @@
 </p:notes>
 </file>
 
+<file path=ppt/notesSlides/notesSlide10.xml><?xml version="1.0" encoding="utf-8"?>
+<p:notes xmlns:a="http://schemas.openxmlformats.org/drawingml/2006/main" xmlns:r="http://schemas.openxmlformats.org/officeDocument/2006/relationships" xmlns:p="http://schemas.openxmlformats.org/presentationml/2006/main">
+  <p:cSld>
+    <p:spTree>
+      <p:nvGrpSpPr>
+        <p:cNvPr id="1" name=""/>
+        <p:cNvGrpSpPr/>
+        <p:nvPr/>
+      </p:nvGrpSpPr>
+      <p:grpSpPr>
+        <a:xfrm>
+          <a:off x="0" y="0"/>
+          <a:ext cx="0" cy="0"/>
+          <a:chOff x="0" y="0"/>
+          <a:chExt cx="0" cy="0"/>
+        </a:xfrm>
+      </p:grpSpPr>
+      <p:sp>
+        <p:nvSpPr>
+          <p:cNvPr id="2" name="Slide Image Placeholder 1"/>
+          <p:cNvSpPr>
+            <a:spLocks noGrp="1" noRot="1" noChangeAspect="1"/>
+          </p:cNvSpPr>
+          <p:nvPr>
+            <p:ph type="sldImg"/>
+          </p:nvPr>
+        </p:nvSpPr>
+        <p:spPr/>
+      </p:sp>
+      <p:sp>
+        <p:nvSpPr>
+          <p:cNvPr id="3" name="Notes Placeholder 2"/>
+          <p:cNvSpPr>
+            <a:spLocks noGrp="1"/>
+          </p:cNvSpPr>
+          <p:nvPr>
+            <p:ph type="body" idx="1"/>
+          </p:nvPr>
+        </p:nvSpPr>
+        <p:spPr/>
+        <p:txBody>
+          <a:bodyPr/>
+          <a:lstStyle/>
+          <a:p>
+            <a:r>
+              <a:rPr lang="en-US" dirty="0"/>
+              <a:t>Как проект будет развиваться. Сейчас, на хакатоне, у нас работающий MVP на синтетических данных. Следующий шаг — проверка с пользователями: даём сервис десяти студентам, цель — чтобы не меньше 70% оценили ответ на 4 или 5 из 5, и сверяем точность расчёта на реальных выписках. Параллельно доводим поиск подписок и цели накопления. Дальше — модуль внутри приложения Т-Банка на реальных транзакциях с согласия клиента, затем другие банки и молодые специалисты. Главное, что проверяем в пилоте: открывают ли студенты лимит каждый день — это и есть удержание для банка.</a:t>
+            </a:r>
+          </a:p>
+        </p:txBody>
+      </p:sp>
+      <p:sp>
+        <p:nvSpPr>
+          <p:cNvPr id="4" name="Slide Number Placeholder 3"/>
+          <p:cNvSpPr>
+            <a:spLocks noGrp="1"/>
+          </p:cNvSpPr>
+          <p:nvPr>
+            <p:ph type="sldNum" sz="quarter" idx="10"/>
+          </p:nvPr>
+        </p:nvSpPr>
+        <p:spPr/>
+        <p:txBody>
+          <a:bodyPr/>
+          <a:lstStyle/>
+          <a:p>
+            <a:fld id="{F7021451-1387-4CA6-816F-3879F97B5CBC}" type="slidenum">
+              <a:rPr lang="en-US"/>
+              <a:t>10</a:t>
+            </a:fld>
+            <a:endParaRPr lang="en-US"/>
+          </a:p>
+        </p:txBody>
+      </p:sp>
+    </p:spTree>
+    <p:extLst>
+      <p:ext uri="{BB962C8B-B14F-4D97-AF65-F5344CB8AC3E}">
+        <p14:creationId xmlns:p14="http://schemas.microsoft.com/office/powerpoint/2010/main" val="1024086991"/>
+      </p:ext>
+    </p:extLst>
+  </p:cSld>
+  <p:clrMapOvr>
+    <a:masterClrMapping/>
+  </p:clrMapOvr>
+</p:notes>
+</file>
+
+<file path=ppt/notesSlides/notesSlide11.xml><?xml version="1.0" encoding="utf-8"?>
+<p:notes xmlns:a="http://schemas.openxmlformats.org/drawingml/2006/main" xmlns:r="http://schemas.openxmlformats.org/officeDocument/2006/relationships" xmlns:p="http://schemas.openxmlformats.org/presentationml/2006/main">
+  <p:cSld>
+    <p:spTree>
+      <p:nvGrpSpPr>
+        <p:cNvPr id="1" name=""/>
+        <p:cNvGrpSpPr/>
+        <p:nvPr/>
+      </p:nvGrpSpPr>
+      <p:grpSpPr>
+        <a:xfrm>
+          <a:off x="0" y="0"/>
+          <a:ext cx="0" cy="0"/>
+          <a:chOff x="0" y="0"/>
+          <a:chExt cx="0" cy="0"/>
+        </a:xfrm>
+      </p:grpSpPr>
+      <p:sp>
+        <p:nvSpPr>
+          <p:cNvPr id="2" name="Slide Image Placeholder 1"/>
+          <p:cNvSpPr>
+            <a:spLocks noGrp="1" noRot="1" noChangeAspect="1"/>
+          </p:cNvSpPr>
+          <p:nvPr>
+            <p:ph type="sldImg"/>
+          </p:nvPr>
+        </p:nvSpPr>
+        <p:spPr/>
+      </p:sp>
+      <p:sp>
+        <p:nvSpPr>
+          <p:cNvPr id="3" name="Notes Placeholder 2"/>
+          <p:cNvSpPr>
+            <a:spLocks noGrp="1"/>
+          </p:cNvSpPr>
+          <p:nvPr>
+            <p:ph type="body" idx="1"/>
+          </p:nvPr>
+        </p:nvSpPr>
+        <p:spPr/>
+        <p:txBody>
+          <a:bodyPr/>
+          <a:lstStyle/>
+          <a:p>
+            <a:r>
+              <a:rPr lang="en-US" dirty="0"/>
+              <a:t>Итог. Проблема — 1,6 миллиона студентов с нерегулярным доходом не понимают, сколько можно тратить до следующего поступления. Наше решение — одна цифра на сегодня: GigaChat понимает вопрос, код считает, ответ показывает допущения. Ценность для студента — он видит нехватку денег заранее и успевает решить, что урезать. Честно о границах: доход мы не увеличиваем, работаем на синтетических данных и не даём инвестсоветов. Для Т-Банка это лояльные молодые клиенты и пилот, который окупается в первый год. По QR — полный отчёт с финмоделью. Спасибо, готовы ответить на вопросы.</a:t>
+            </a:r>
+          </a:p>
+        </p:txBody>
+      </p:sp>
+      <p:sp>
+        <p:nvSpPr>
+          <p:cNvPr id="4" name="Slide Number Placeholder 3"/>
+          <p:cNvSpPr>
+            <a:spLocks noGrp="1"/>
+          </p:cNvSpPr>
+          <p:nvPr>
+            <p:ph type="sldNum" sz="quarter" idx="10"/>
+          </p:nvPr>
+        </p:nvSpPr>
+        <p:spPr/>
+        <p:txBody>
+          <a:bodyPr/>
+          <a:lstStyle/>
+          <a:p>
+            <a:fld id="{F7021451-1387-4CA6-816F-3879F97B5CBC}" type="slidenum">
+              <a:rPr lang="en-US"/>
+              <a:t>11</a:t>
+            </a:fld>
+            <a:endParaRPr lang="en-US"/>
+          </a:p>
+        </p:txBody>
+      </p:sp>
+    </p:spTree>
+    <p:extLst>
+      <p:ext uri="{BB962C8B-B14F-4D97-AF65-F5344CB8AC3E}">
+        <p14:creationId xmlns:p14="http://schemas.microsoft.com/office/powerpoint/2010/main" val="1024086991"/>
+      </p:ext>
+    </p:extLst>
+  </p:cSld>
+  <p:clrMapOvr>
+    <a:masterClrMapping/>
+  </p:clrMapOvr>
+</p:notes>
+</file>
+
 <file path=ppt/notesSlides/notesSlide2.xml><?xml version="1.0" encoding="utf-8"?>
 <p:notes xmlns:a="http://schemas.openxmlformats.org/drawingml/2006/main" xmlns:r="http://schemas.openxmlformats.org/officeDocument/2006/relationships" xmlns:p="http://schemas.openxmlformats.org/presentationml/2006/main">
   <p:cSld>
@@ -726,7 +902,7 @@
           <a:p>
             <a:r>
               <a:rPr lang="en-US" dirty="0"/>
-              <a:t>Чем мы отличаемся. Каждое решение отвечает на свой вопрос. Приложение банка — куда ушли деньги, то есть показывает прошлое. Приложения учёта — сколько потрачено по категориям, но учёт надо вести вручную, и бюджет рассчитан на регулярную зарплату. Обычный AI-чат даст совет, но данные в него нужно вводить самому, и в цифрах он может ошибиться. Мы отвечаем на вопрос, который студенту нужен каждый день: сколько можно потратить сегодня. Поэтому мы не конкурируем с приложением банка, а дополняем его. Ближайший зарубежный аналог, Cleo, в России недоступен.</a:t>
+              <a:t>Это не макет, а работающий сервис — он открывается по ссылке без регистрации. Уже работает: загрузка данных — готовый профиль, свой файл или форма; расчёт дневного лимита и прогноз; чат на GigaChat, где модель выбирает расчёт, а код считает; проверка покупки и разбор трат по категориям. Сервис честно сообщает, если данных не хватает или они ошибочные, и отказывается давать инвестсоветы. [Запускаем скринкаст; копия — на флешке.] Сценарий: студент с подработкой видит лимит 471 рубль, спрашивает про кроссовки за три тысячи — и получает пересчёт: 257 рублей в день, с объяснением.</a:t>
             </a:r>
           </a:p>
         </p:txBody>
@@ -757,7 +933,7 @@
     </p:spTree>
     <p:extLst>
       <p:ext uri="{BB962C8B-B14F-4D97-AF65-F5344CB8AC3E}">
-        <p14:creationId xmlns:p14="http://schemas.microsoft.com/office/powerpoint/2010/main" val="1024086991"/>
+        <p14:creationId xmlns:p14="http://schemas.microsoft.com/office/powerpoint/2010/main" val="957305644"/>
       </p:ext>
     </p:extLst>
   </p:cSld>
@@ -813,7 +989,7 @@
           <a:p>
             <a:r>
               <a:rPr lang="en-US" dirty="0"/>
-              <a:t>Зачем это Т-Банку. Для студента базовый лимит бесплатный. Банк зарабатывает косвенно: студенты приходят в банк ради функции — это экономия на привлечении, ориентир — до трёх тысяч рублей по «Приведи друга». И удержание: клиент, который каждый день открывает приложение ради лимита, не уходит в другой банк. Прямая прибыль — расширенный режим в подписке Pro за 299 рублей. Главная переменная затрата — запросы к GigaChat Lite: около 16 рублей на пользователя в год. На пилоте в 50 тысяч студентов пилот окупается уже в первый год во всех трёх сценариях: от плюс 0,5 до плюс 7,7 миллиона, в базовом — плюс 3,7 миллиона. Сложные вопросы можно отдавать GigaChat Pro, но суммы всё равно считает код.</a:t>
+              <a:t>Это не макет, а работающий сервис — он открывается по ссылке без регистрации. Уже работает: загрузка данных — готовый профиль, свой файл или форма; расчёт дневного лимита и прогноз; чат на GigaChat, где модель выбирает расчёт, а код считает; проверка покупки и разбор трат по категориям. Сервис честно сообщает, если данных не хватает или они ошибочные, и отказывается давать инвестсоветы. [Запускаем скринкаст; копия — на флешке.] Сценарий: студент с подработкой видит лимит 471 рубль, спрашивает про кроссовки за три тысячи — и получает пересчёт: 257 рублей в день, с объяснением.</a:t>
             </a:r>
           </a:p>
         </p:txBody>
@@ -844,7 +1020,7 @@
     </p:spTree>
     <p:extLst>
       <p:ext uri="{BB962C8B-B14F-4D97-AF65-F5344CB8AC3E}">
-        <p14:creationId xmlns:p14="http://schemas.microsoft.com/office/powerpoint/2010/main" val="1024086991"/>
+        <p14:creationId xmlns:p14="http://schemas.microsoft.com/office/powerpoint/2010/main" val="2619348273"/>
       </p:ext>
     </p:extLst>
   </p:cSld>
@@ -900,7 +1076,7 @@
           <a:p>
             <a:r>
               <a:rPr lang="en-US" dirty="0"/>
-              <a:t>Как проект будет развиваться. Сейчас, на хакатоне, у нас работающий MVP на синтетических данных. Следующий шаг — проверка с пользователями: даём сервис десяти студентам, цель — чтобы не меньше 70% оценили ответ на 4 или 5 из 5, и сверяем точность расчёта на реальных выписках. Параллельно доводим поиск подписок и цели накопления. Дальше — модуль внутри приложения Т-Банка на реальных транзакциях с согласия клиента, затем другие банки и молодые специалисты. Главное, что проверяем в пилоте: открывают ли студенты лимит каждый день — это и есть удержание для банка.</a:t>
+              <a:t>Чем мы отличаемся. Каждое решение отвечает на свой вопрос. Приложение банка — куда ушли деньги, то есть показывает прошлое. Приложения учёта — сколько потрачено по категориям, но учёт надо вести вручную, и бюджет рассчитан на регулярную зарплату. Обычный AI-чат даст совет, но данные в него нужно вводить самому, и в цифрах он может ошибиться. Мы отвечаем на вопрос, который студенту нужен каждый день: сколько можно потратить сегодня. Поэтому мы не конкурируем с приложением банка, а дополняем его. Ближайший зарубежный аналог, Cleo, в России недоступен.</a:t>
             </a:r>
           </a:p>
         </p:txBody>
@@ -987,7 +1163,7 @@
           <a:p>
             <a:r>
               <a:rPr lang="en-US" dirty="0"/>
-              <a:t>Итог. Проблема — 1,6 миллиона студентов с нерегулярным доходом не понимают, сколько можно тратить до следующего поступления. Наше решение — одна цифра на сегодня: GigaChat понимает вопрос, код считает, ответ показывает допущения. Ценность для студента — он видит нехватку денег заранее и успевает решить, что урезать. Честно о границах: доход мы не увеличиваем, работаем на синтетических данных и не даём инвестсоветов. Для Т-Банка это лояльные молодые клиенты и пилот, который окупается в первый год. По QR — полный отчёт с финмоделью. Спасибо, готовы ответить на вопросы.</a:t>
+              <a:t>Зачем это Т-Банку. Для студента базовый лимит бесплатный. Банк зарабатывает косвенно: студенты приходят в банк ради функции — это экономия на привлечении, ориентир — до трёх тысяч рублей по «Приведи друга». И удержание: клиент, который каждый день открывает приложение ради лимита, не уходит в другой банк. Прямая прибыль — расширенный режим в подписке Pro за 299 рублей. Главная переменная затрата — запросы к GigaChat Lite: около 16 рублей на пользователя в год. На пилоте в 50 тысяч студентов пилот окупается уже в первый год во всех трёх сценариях: от плюс 0,5 до плюс 7,7 миллиона, в базовом — плюс 3,7 миллиона. Сложные вопросы можно отдавать GigaChat Pro, но суммы всё равно считает код.</a:t>
             </a:r>
           </a:p>
         </p:txBody>
@@ -1757,6 +1933,1463 @@
 </p:sld>
 </file>
 
+<file path=ppt/slides/slide10.xml><?xml version="1.0" encoding="utf-8"?>
+<p:sld xmlns:a="http://schemas.openxmlformats.org/drawingml/2006/main" xmlns:r="http://schemas.openxmlformats.org/officeDocument/2006/relationships" xmlns:p="http://schemas.openxmlformats.org/presentationml/2006/main">
+  <p:cSld name="Slide 8">
+    <p:bg>
+      <p:bgPr>
+        <a:solidFill>
+          <a:srgbClr val="F6F3EC"/>
+        </a:solidFill>
+        <a:effectLst/>
+      </p:bgPr>
+    </p:bg>
+    <p:spTree>
+      <p:nvGrpSpPr>
+        <p:cNvPr id="1" name=""/>
+        <p:cNvGrpSpPr/>
+        <p:nvPr/>
+      </p:nvGrpSpPr>
+      <p:grpSpPr>
+        <a:xfrm>
+          <a:off x="0" y="0"/>
+          <a:ext cx="0" cy="0"/>
+          <a:chOff x="0" y="0"/>
+          <a:chExt cx="0" cy="0"/>
+        </a:xfrm>
+      </p:grpSpPr>
+      <p:sp>
+        <p:nvSpPr>
+          <p:cNvPr id="2" name="Text 0"/>
+          <p:cNvSpPr/>
+          <p:nvPr/>
+        </p:nvSpPr>
+        <p:spPr>
+          <a:xfrm>
+            <a:off x="812800" y="812800"/>
+            <a:ext cx="10883392" cy="528320"/>
+          </a:xfrm>
+          <a:prstGeom prst="rect">
+            <a:avLst/>
+          </a:prstGeom>
+          <a:noFill/>
+          <a:ln/>
+        </p:spPr>
+        <p:txBody>
+          <a:bodyPr wrap="square" lIns="0" tIns="0" rIns="0" bIns="0" rtlCol="0" anchor="t">
+            <a:normAutofit/>
+          </a:bodyPr>
+          <a:lstStyle/>
+          <a:p>
+            <a:pPr marL="0" indent="0" algn="l">
+              <a:lnSpc>
+                <a:spcPts val="3960"/>
+              </a:lnSpc>
+              <a:buNone/>
+            </a:pPr>
+            <a:r>
+              <a:rPr lang="en-US" sz="3600" b="1" dirty="0">
+                <a:solidFill>
+                  <a:srgbClr val="16202E"/>
+                </a:solidFill>
+                <a:latin typeface="Rubik" pitchFamily="34" charset="0"/>
+                <a:ea typeface="Rubik" pitchFamily="34" charset="-122"/>
+                <a:cs typeface="Rubik" pitchFamily="34" charset="-120"/>
+              </a:rPr>
+              <a:t>Развитие проекта</a:t>
+            </a:r>
+            <a:endParaRPr lang="en-US" sz="3600" dirty="0"/>
+          </a:p>
+        </p:txBody>
+      </p:sp>
+      <p:sp>
+        <p:nvSpPr>
+          <p:cNvPr id="3" name="Shape 1"/>
+          <p:cNvSpPr/>
+          <p:nvPr/>
+        </p:nvSpPr>
+        <p:spPr>
+          <a:xfrm>
+            <a:off x="822325" y="1630046"/>
+            <a:ext cx="3144044" cy="2543810"/>
+          </a:xfrm>
+          <a:prstGeom prst="roundRect">
+            <a:avLst>
+              <a:gd name="adj" fmla="val 5617"/>
+            </a:avLst>
+          </a:prstGeom>
+          <a:solidFill>
+            <a:srgbClr val="FBE9CC"/>
+          </a:solidFill>
+          <a:ln w="19050">
+            <a:solidFill>
+              <a:srgbClr val="F0A53A"/>
+            </a:solidFill>
+            <a:prstDash val="solid"/>
+          </a:ln>
+        </p:spPr>
+      </p:sp>
+      <p:sp>
+        <p:nvSpPr>
+          <p:cNvPr id="4" name="Text 2"/>
+          <p:cNvSpPr/>
+          <p:nvPr/>
+        </p:nvSpPr>
+        <p:spPr>
+          <a:xfrm>
+            <a:off x="1082040" y="1889761"/>
+            <a:ext cx="2703352" cy="238760"/>
+          </a:xfrm>
+          <a:prstGeom prst="rect">
+            <a:avLst/>
+          </a:prstGeom>
+          <a:noFill/>
+          <a:ln/>
+        </p:spPr>
+        <p:txBody>
+          <a:bodyPr wrap="square" lIns="0" tIns="0" rIns="0" bIns="0" rtlCol="0" anchor="t">
+            <a:normAutofit/>
+          </a:bodyPr>
+          <a:lstStyle/>
+          <a:p>
+            <a:pPr marL="0" indent="0" algn="l">
+              <a:lnSpc>
+                <a:spcPts val="1680"/>
+              </a:lnSpc>
+              <a:buNone/>
+            </a:pPr>
+            <a:r>
+              <a:rPr lang="en-US" sz="1400" b="1" kern="0" spc="100" dirty="0">
+                <a:solidFill>
+                  <a:srgbClr val="B25A06"/>
+                </a:solidFill>
+                <a:latin typeface="Rubik"/>
+                <a:ea typeface="IBM Plex Sans" pitchFamily="34" charset="-122"/>
+                <a:cs typeface="IBM Plex Sans" pitchFamily="34" charset="-120"/>
+              </a:rPr>
+              <a:t>01 · ХАКАТОН</a:t>
+            </a:r>
+            <a:endParaRPr lang="en-US" sz="1400" dirty="0">
+              <a:latin typeface="Rubik"/>
+            </a:endParaRPr>
+          </a:p>
+        </p:txBody>
+      </p:sp>
+      <p:sp>
+        <p:nvSpPr>
+          <p:cNvPr id="5" name="Text 3"/>
+          <p:cNvSpPr/>
+          <p:nvPr/>
+        </p:nvSpPr>
+        <p:spPr>
+          <a:xfrm>
+            <a:off x="1082040" y="2192021"/>
+            <a:ext cx="2703352" cy="360680"/>
+          </a:xfrm>
+          <a:prstGeom prst="rect">
+            <a:avLst/>
+          </a:prstGeom>
+          <a:noFill/>
+          <a:ln/>
+        </p:spPr>
+        <p:txBody>
+          <a:bodyPr wrap="square" lIns="0" tIns="0" rIns="0" bIns="0" rtlCol="0" anchor="t">
+            <a:normAutofit/>
+          </a:bodyPr>
+          <a:lstStyle/>
+          <a:p>
+            <a:pPr marL="0" indent="0" algn="l">
+              <a:lnSpc>
+                <a:spcPts val="2640"/>
+              </a:lnSpc>
+              <a:buNone/>
+            </a:pPr>
+            <a:r>
+              <a:rPr lang="en-US" sz="2800" b="1" dirty="0">
+                <a:solidFill>
+                  <a:srgbClr val="16202E"/>
+                </a:solidFill>
+                <a:latin typeface="Rubik"/>
+                <a:ea typeface="IBM Plex Sans" pitchFamily="34" charset="-122"/>
+                <a:cs typeface="IBM Plex Sans" pitchFamily="34" charset="-120"/>
+              </a:rPr>
+              <a:t>MVP</a:t>
+            </a:r>
+            <a:endParaRPr lang="en-US" sz="2800" dirty="0">
+              <a:latin typeface="Rubik"/>
+            </a:endParaRPr>
+          </a:p>
+        </p:txBody>
+      </p:sp>
+      <p:sp>
+        <p:nvSpPr>
+          <p:cNvPr id="6" name="Text 4"/>
+          <p:cNvSpPr/>
+          <p:nvPr/>
+        </p:nvSpPr>
+        <p:spPr>
+          <a:xfrm>
+            <a:off x="1082040" y="2616200"/>
+            <a:ext cx="2703352" cy="1021080"/>
+          </a:xfrm>
+          <a:prstGeom prst="rect">
+            <a:avLst/>
+          </a:prstGeom>
+          <a:noFill/>
+          <a:ln/>
+        </p:spPr>
+        <p:txBody>
+          <a:bodyPr wrap="square" lIns="0" tIns="0" rIns="0" bIns="0" rtlCol="0" anchor="t">
+            <a:normAutofit/>
+          </a:bodyPr>
+          <a:lstStyle/>
+          <a:p>
+            <a:pPr marL="0" indent="0" algn="l">
+              <a:lnSpc>
+                <a:spcPts val="1960"/>
+              </a:lnSpc>
+              <a:buNone/>
+            </a:pPr>
+            <a:r>
+              <a:rPr lang="en-US" sz="1500" dirty="0">
+                <a:solidFill>
+                  <a:srgbClr val="4A5566"/>
+                </a:solidFill>
+                <a:latin typeface="Cambria" panose="02040503050406030204" pitchFamily="18" charset="0"/>
+                <a:ea typeface="Cambria" panose="02040503050406030204" pitchFamily="18" charset="0"/>
+                <a:cs typeface="IBM Plex Sans" pitchFamily="34" charset="-120"/>
+              </a:rPr>
+              <a:t>Веб-сервис на синтетических данных: лимит, проверка покупки, </a:t>
+            </a:r>
+            <a:r>
+              <a:rPr lang="en-US" sz="1500" dirty="0" err="1">
+                <a:solidFill>
+                  <a:srgbClr val="4A5566"/>
+                </a:solidFill>
+                <a:latin typeface="Cambria" panose="02040503050406030204" pitchFamily="18" charset="0"/>
+                <a:ea typeface="Cambria" panose="02040503050406030204" pitchFamily="18" charset="0"/>
+                <a:cs typeface="IBM Plex Sans" pitchFamily="34" charset="-120"/>
+              </a:rPr>
+              <a:t>чат</a:t>
+            </a:r>
+            <a:r>
+              <a:rPr lang="en-US" sz="1500" dirty="0">
+                <a:solidFill>
+                  <a:srgbClr val="4A5566"/>
+                </a:solidFill>
+                <a:latin typeface="Cambria" panose="02040503050406030204" pitchFamily="18" charset="0"/>
+                <a:ea typeface="Cambria" panose="02040503050406030204" pitchFamily="18" charset="0"/>
+                <a:cs typeface="IBM Plex Sans" pitchFamily="34" charset="-120"/>
+              </a:rPr>
+              <a:t> </a:t>
+            </a:r>
+            <a:r>
+              <a:rPr lang="en-US" sz="1500" dirty="0" err="1">
+                <a:solidFill>
+                  <a:srgbClr val="4A5566"/>
+                </a:solidFill>
+                <a:latin typeface="Cambria" panose="02040503050406030204" pitchFamily="18" charset="0"/>
+                <a:ea typeface="Cambria" panose="02040503050406030204" pitchFamily="18" charset="0"/>
+                <a:cs typeface="IBM Plex Sans" pitchFamily="34" charset="-120"/>
+              </a:rPr>
+              <a:t>на</a:t>
+            </a:r>
+            <a:r>
+              <a:rPr lang="en-US" sz="1500" dirty="0">
+                <a:solidFill>
+                  <a:srgbClr val="4A5566"/>
+                </a:solidFill>
+                <a:latin typeface="Cambria" panose="02040503050406030204" pitchFamily="18" charset="0"/>
+                <a:ea typeface="Cambria" panose="02040503050406030204" pitchFamily="18" charset="0"/>
+                <a:cs typeface="IBM Plex Sans" pitchFamily="34" charset="-120"/>
+              </a:rPr>
+              <a:t> LLM, проверочные примеры</a:t>
+            </a:r>
+            <a:endParaRPr lang="en-US" sz="1500" dirty="0">
+              <a:latin typeface="Cambria" panose="02040503050406030204" pitchFamily="18" charset="0"/>
+              <a:ea typeface="Cambria" panose="02040503050406030204" pitchFamily="18" charset="0"/>
+            </a:endParaRPr>
+          </a:p>
+        </p:txBody>
+      </p:sp>
+      <p:sp>
+        <p:nvSpPr>
+          <p:cNvPr id="7" name="Text 5"/>
+          <p:cNvSpPr/>
+          <p:nvPr/>
+        </p:nvSpPr>
+        <p:spPr>
+          <a:xfrm>
+            <a:off x="1082040" y="3756659"/>
+            <a:ext cx="2703352" cy="238760"/>
+          </a:xfrm>
+          <a:prstGeom prst="rect">
+            <a:avLst/>
+          </a:prstGeom>
+          <a:noFill/>
+          <a:ln/>
+        </p:spPr>
+        <p:txBody>
+          <a:bodyPr wrap="square" lIns="0" tIns="0" rIns="0" bIns="0" rtlCol="0" anchor="t">
+            <a:normAutofit/>
+          </a:bodyPr>
+          <a:lstStyle/>
+          <a:p>
+            <a:pPr marL="0" indent="0" algn="l">
+              <a:lnSpc>
+                <a:spcPts val="1680"/>
+              </a:lnSpc>
+              <a:buNone/>
+            </a:pPr>
+            <a:r>
+              <a:rPr lang="en-US" sz="1400" b="1" dirty="0">
+                <a:solidFill>
+                  <a:srgbClr val="16202E"/>
+                </a:solidFill>
+                <a:latin typeface="Cambria" panose="02040503050406030204" pitchFamily="18" charset="0"/>
+                <a:ea typeface="Cambria" panose="02040503050406030204" pitchFamily="18" charset="0"/>
+                <a:cs typeface="IBM Plex Sans" pitchFamily="34" charset="-120"/>
+              </a:rPr>
+              <a:t>Готово к защите</a:t>
+            </a:r>
+            <a:endParaRPr lang="en-US" sz="1400" dirty="0">
+              <a:latin typeface="Cambria" panose="02040503050406030204" pitchFamily="18" charset="0"/>
+              <a:ea typeface="Cambria" panose="02040503050406030204" pitchFamily="18" charset="0"/>
+            </a:endParaRPr>
+          </a:p>
+        </p:txBody>
+      </p:sp>
+      <p:pic>
+        <p:nvPicPr>
+          <p:cNvPr id="8" name="Image 0" descr="arrow-right"/>
+          <p:cNvPicPr>
+            <a:picLocks noChangeAspect="1"/>
+          </p:cNvPicPr>
+          <p:nvPr/>
+        </p:nvPicPr>
+        <p:blipFill>
+          <a:blip r:embed="rId3"/>
+          <a:srcRect/>
+          <a:stretch/>
+        </p:blipFill>
+        <p:spPr>
+          <a:xfrm>
+            <a:off x="4077494" y="2800350"/>
+            <a:ext cx="355600" cy="203200"/>
+          </a:xfrm>
+          <a:prstGeom prst="rect">
+            <a:avLst/>
+          </a:prstGeom>
+        </p:spPr>
+      </p:pic>
+      <p:sp>
+        <p:nvSpPr>
+          <p:cNvPr id="9" name="Shape 6"/>
+          <p:cNvSpPr/>
+          <p:nvPr/>
+        </p:nvSpPr>
+        <p:spPr>
+          <a:xfrm>
+            <a:off x="4537869" y="1623696"/>
+            <a:ext cx="3136503" cy="2556510"/>
+          </a:xfrm>
+          <a:prstGeom prst="roundRect">
+            <a:avLst>
+              <a:gd name="adj" fmla="val 5837"/>
+            </a:avLst>
+          </a:prstGeom>
+          <a:solidFill>
+            <a:srgbClr val="FDFBF6"/>
+          </a:solidFill>
+          <a:ln w="6350">
+            <a:solidFill>
+              <a:srgbClr val="E2DCCF"/>
+            </a:solidFill>
+            <a:prstDash val="solid"/>
+          </a:ln>
+        </p:spPr>
+      </p:sp>
+      <p:sp>
+        <p:nvSpPr>
+          <p:cNvPr id="10" name="Text 7"/>
+          <p:cNvSpPr/>
+          <p:nvPr/>
+        </p:nvSpPr>
+        <p:spPr>
+          <a:xfrm>
+            <a:off x="4793774" y="1879600"/>
+            <a:ext cx="2703434" cy="238760"/>
+          </a:xfrm>
+          <a:prstGeom prst="rect">
+            <a:avLst/>
+          </a:prstGeom>
+          <a:noFill/>
+          <a:ln/>
+        </p:spPr>
+        <p:txBody>
+          <a:bodyPr wrap="square" lIns="0" tIns="0" rIns="0" bIns="0" rtlCol="0" anchor="t">
+            <a:normAutofit/>
+          </a:bodyPr>
+          <a:lstStyle/>
+          <a:p>
+            <a:pPr marL="0" indent="0" algn="l">
+              <a:lnSpc>
+                <a:spcPts val="1680"/>
+              </a:lnSpc>
+              <a:buNone/>
+            </a:pPr>
+            <a:r>
+              <a:rPr lang="en-US" sz="1400" b="1" kern="0" spc="100" dirty="0">
+                <a:solidFill>
+                  <a:srgbClr val="B25A06"/>
+                </a:solidFill>
+                <a:latin typeface="Rubik"/>
+                <a:ea typeface="IBM Plex Sans" pitchFamily="34" charset="-122"/>
+                <a:cs typeface="IBM Plex Sans" pitchFamily="34" charset="-120"/>
+              </a:rPr>
+              <a:t>02 · БЛИЖАЙШИЙ ЭТАП</a:t>
+            </a:r>
+            <a:endParaRPr lang="en-US" sz="1400" dirty="0">
+              <a:latin typeface="Rubik"/>
+            </a:endParaRPr>
+          </a:p>
+        </p:txBody>
+      </p:sp>
+      <p:sp>
+        <p:nvSpPr>
+          <p:cNvPr id="11" name="Text 8"/>
+          <p:cNvSpPr/>
+          <p:nvPr/>
+        </p:nvSpPr>
+        <p:spPr>
+          <a:xfrm>
+            <a:off x="4793774" y="2181861"/>
+            <a:ext cx="2703434" cy="360680"/>
+          </a:xfrm>
+          <a:prstGeom prst="rect">
+            <a:avLst/>
+          </a:prstGeom>
+          <a:noFill/>
+          <a:ln/>
+        </p:spPr>
+        <p:txBody>
+          <a:bodyPr wrap="square" lIns="0" tIns="0" rIns="0" bIns="0" rtlCol="0" anchor="t">
+            <a:normAutofit/>
+          </a:bodyPr>
+          <a:lstStyle/>
+          <a:p>
+            <a:pPr marL="0" indent="0" algn="l">
+              <a:lnSpc>
+                <a:spcPts val="2640"/>
+              </a:lnSpc>
+              <a:buNone/>
+            </a:pPr>
+            <a:r>
+              <a:rPr lang="en-US" sz="2800" b="1" dirty="0">
+                <a:solidFill>
+                  <a:srgbClr val="16202E"/>
+                </a:solidFill>
+                <a:latin typeface="Rubik"/>
+                <a:ea typeface="IBM Plex Sans" pitchFamily="34" charset="-122"/>
+                <a:cs typeface="IBM Plex Sans" pitchFamily="34" charset="-120"/>
+              </a:rPr>
+              <a:t>Проверка</a:t>
+            </a:r>
+            <a:endParaRPr lang="en-US" sz="2800" dirty="0">
+              <a:latin typeface="Rubik"/>
+            </a:endParaRPr>
+          </a:p>
+        </p:txBody>
+      </p:sp>
+      <p:sp>
+        <p:nvSpPr>
+          <p:cNvPr id="12" name="Text 9"/>
+          <p:cNvSpPr/>
+          <p:nvPr/>
+        </p:nvSpPr>
+        <p:spPr>
+          <a:xfrm>
+            <a:off x="4793774" y="2606039"/>
+            <a:ext cx="2703434" cy="1270000"/>
+          </a:xfrm>
+          <a:prstGeom prst="rect">
+            <a:avLst/>
+          </a:prstGeom>
+          <a:noFill/>
+          <a:ln/>
+        </p:spPr>
+        <p:txBody>
+          <a:bodyPr wrap="square" lIns="0" tIns="0" rIns="0" bIns="0" rtlCol="0" anchor="t">
+            <a:normAutofit/>
+          </a:bodyPr>
+          <a:lstStyle/>
+          <a:p>
+            <a:pPr marL="0" indent="0" algn="l">
+              <a:lnSpc>
+                <a:spcPts val="1960"/>
+              </a:lnSpc>
+              <a:buNone/>
+            </a:pPr>
+            <a:r>
+              <a:rPr lang="en-US" sz="1500" dirty="0">
+                <a:solidFill>
+                  <a:srgbClr val="4A5566"/>
+                </a:solidFill>
+                <a:latin typeface="Cambria" panose="02040503050406030204" pitchFamily="18" charset="0"/>
+                <a:ea typeface="Cambria" panose="02040503050406030204" pitchFamily="18" charset="0"/>
+                <a:cs typeface="IBM Plex Sans" pitchFamily="34" charset="-120"/>
+              </a:rPr>
+              <a:t>Тест с 10 студентами: цель — не меньше 70% оценок 4–5 из 5. Точность расчёта на реальных выписках. Поиск подписок и цели накопления</a:t>
+            </a:r>
+            <a:endParaRPr lang="en-US" sz="1500" dirty="0">
+              <a:latin typeface="Cambria" panose="02040503050406030204" pitchFamily="18" charset="0"/>
+              <a:ea typeface="Cambria" panose="02040503050406030204" pitchFamily="18" charset="0"/>
+            </a:endParaRPr>
+          </a:p>
+        </p:txBody>
+      </p:sp>
+      <p:pic>
+        <p:nvPicPr>
+          <p:cNvPr id="13" name="Image 1" descr="arrow-right"/>
+          <p:cNvPicPr>
+            <a:picLocks noChangeAspect="1"/>
+          </p:cNvPicPr>
+          <p:nvPr/>
+        </p:nvPicPr>
+        <p:blipFill>
+          <a:blip r:embed="rId3"/>
+          <a:srcRect/>
+          <a:stretch/>
+        </p:blipFill>
+        <p:spPr>
+          <a:xfrm>
+            <a:off x="7779147" y="2800350"/>
+            <a:ext cx="355600" cy="203200"/>
+          </a:xfrm>
+          <a:prstGeom prst="rect">
+            <a:avLst/>
+          </a:prstGeom>
+        </p:spPr>
+      </p:pic>
+      <p:sp>
+        <p:nvSpPr>
+          <p:cNvPr id="14" name="Shape 10"/>
+          <p:cNvSpPr/>
+          <p:nvPr/>
+        </p:nvSpPr>
+        <p:spPr>
+          <a:xfrm>
+            <a:off x="8239522" y="1623696"/>
+            <a:ext cx="3136503" cy="2556510"/>
+          </a:xfrm>
+          <a:prstGeom prst="roundRect">
+            <a:avLst>
+              <a:gd name="adj" fmla="val 5837"/>
+            </a:avLst>
+          </a:prstGeom>
+          <a:solidFill>
+            <a:srgbClr val="FDFBF6"/>
+          </a:solidFill>
+          <a:ln w="6350">
+            <a:solidFill>
+              <a:srgbClr val="E2DCCF"/>
+            </a:solidFill>
+            <a:prstDash val="solid"/>
+          </a:ln>
+        </p:spPr>
+      </p:sp>
+      <p:sp>
+        <p:nvSpPr>
+          <p:cNvPr id="15" name="Text 11"/>
+          <p:cNvSpPr/>
+          <p:nvPr/>
+        </p:nvSpPr>
+        <p:spPr>
+          <a:xfrm>
+            <a:off x="8495427" y="1879600"/>
+            <a:ext cx="2703434" cy="238760"/>
+          </a:xfrm>
+          <a:prstGeom prst="rect">
+            <a:avLst/>
+          </a:prstGeom>
+          <a:noFill/>
+          <a:ln/>
+        </p:spPr>
+        <p:txBody>
+          <a:bodyPr wrap="square" lIns="0" tIns="0" rIns="0" bIns="0" rtlCol="0" anchor="t">
+            <a:normAutofit/>
+          </a:bodyPr>
+          <a:lstStyle/>
+          <a:p>
+            <a:pPr marL="0" indent="0" algn="l">
+              <a:lnSpc>
+                <a:spcPts val="1680"/>
+              </a:lnSpc>
+              <a:buNone/>
+            </a:pPr>
+            <a:r>
+              <a:rPr lang="en-US" sz="1400" b="1" kern="0" spc="100" dirty="0">
+                <a:solidFill>
+                  <a:srgbClr val="B25A06"/>
+                </a:solidFill>
+                <a:latin typeface="Rubik"/>
+                <a:ea typeface="IBM Plex Sans" pitchFamily="34" charset="-122"/>
+                <a:cs typeface="IBM Plex Sans" pitchFamily="34" charset="-120"/>
+              </a:rPr>
+              <a:t>03 · ДАЛЬШЕ</a:t>
+            </a:r>
+            <a:endParaRPr lang="en-US" sz="1400" dirty="0">
+              <a:latin typeface="Rubik"/>
+            </a:endParaRPr>
+          </a:p>
+        </p:txBody>
+      </p:sp>
+      <p:sp>
+        <p:nvSpPr>
+          <p:cNvPr id="16" name="Text 12"/>
+          <p:cNvSpPr/>
+          <p:nvPr/>
+        </p:nvSpPr>
+        <p:spPr>
+          <a:xfrm>
+            <a:off x="8495427" y="2181861"/>
+            <a:ext cx="2703434" cy="360680"/>
+          </a:xfrm>
+          <a:prstGeom prst="rect">
+            <a:avLst/>
+          </a:prstGeom>
+          <a:noFill/>
+          <a:ln/>
+        </p:spPr>
+        <p:txBody>
+          <a:bodyPr wrap="square" lIns="0" tIns="0" rIns="0" bIns="0" rtlCol="0" anchor="t">
+            <a:normAutofit/>
+          </a:bodyPr>
+          <a:lstStyle/>
+          <a:p>
+            <a:pPr marL="0" indent="0" algn="l">
+              <a:lnSpc>
+                <a:spcPts val="2640"/>
+              </a:lnSpc>
+              <a:buNone/>
+            </a:pPr>
+            <a:r>
+              <a:rPr lang="en-US" sz="2800" b="1" dirty="0">
+                <a:solidFill>
+                  <a:srgbClr val="16202E"/>
+                </a:solidFill>
+                <a:latin typeface="Rubik"/>
+                <a:ea typeface="IBM Plex Sans" pitchFamily="34" charset="-122"/>
+                <a:cs typeface="IBM Plex Sans" pitchFamily="34" charset="-120"/>
+              </a:rPr>
+              <a:t>Масштаб</a:t>
+            </a:r>
+            <a:endParaRPr lang="en-US" sz="2800" dirty="0">
+              <a:latin typeface="Rubik"/>
+            </a:endParaRPr>
+          </a:p>
+        </p:txBody>
+      </p:sp>
+      <p:sp>
+        <p:nvSpPr>
+          <p:cNvPr id="17" name="Text 13"/>
+          <p:cNvSpPr/>
+          <p:nvPr/>
+        </p:nvSpPr>
+        <p:spPr>
+          <a:xfrm>
+            <a:off x="8495427" y="2606039"/>
+            <a:ext cx="2703434" cy="1270000"/>
+          </a:xfrm>
+          <a:prstGeom prst="rect">
+            <a:avLst/>
+          </a:prstGeom>
+          <a:noFill/>
+          <a:ln/>
+        </p:spPr>
+        <p:txBody>
+          <a:bodyPr wrap="square" lIns="0" tIns="0" rIns="0" bIns="0" rtlCol="0" anchor="t">
+            <a:normAutofit/>
+          </a:bodyPr>
+          <a:lstStyle/>
+          <a:p>
+            <a:pPr marL="0" indent="0" algn="l">
+              <a:lnSpc>
+                <a:spcPts val="1960"/>
+              </a:lnSpc>
+              <a:buNone/>
+            </a:pPr>
+            <a:r>
+              <a:rPr lang="en-US" sz="1500" dirty="0">
+                <a:solidFill>
+                  <a:srgbClr val="4A5566"/>
+                </a:solidFill>
+                <a:latin typeface="Cambria" panose="02040503050406030204" pitchFamily="18" charset="0"/>
+                <a:ea typeface="Cambria" panose="02040503050406030204" pitchFamily="18" charset="0"/>
+                <a:cs typeface="IBM Plex Sans" pitchFamily="34" charset="-120"/>
+              </a:rPr>
+              <a:t>Модуль в приложении Т-Банка на реальных транзакциях с согласия клиента. B2B2C для других банков. Молодые специалисты</a:t>
+            </a:r>
+            <a:endParaRPr lang="en-US" sz="1500" dirty="0">
+              <a:latin typeface="Cambria" panose="02040503050406030204" pitchFamily="18" charset="0"/>
+              <a:ea typeface="Cambria" panose="02040503050406030204" pitchFamily="18" charset="0"/>
+            </a:endParaRPr>
+          </a:p>
+        </p:txBody>
+      </p:sp>
+      <p:sp>
+        <p:nvSpPr>
+          <p:cNvPr id="18" name="Text 14"/>
+          <p:cNvSpPr/>
+          <p:nvPr/>
+        </p:nvSpPr>
+        <p:spPr>
+          <a:xfrm>
+            <a:off x="812800" y="4488179"/>
+            <a:ext cx="10883392" cy="594360"/>
+          </a:xfrm>
+          <a:prstGeom prst="rect">
+            <a:avLst/>
+          </a:prstGeom>
+          <a:noFill/>
+          <a:ln/>
+        </p:spPr>
+        <p:txBody>
+          <a:bodyPr wrap="square" lIns="0" tIns="0" rIns="0" bIns="0" rtlCol="0" anchor="t">
+            <a:normAutofit/>
+          </a:bodyPr>
+          <a:lstStyle/>
+          <a:p>
+            <a:pPr marL="0" indent="0" algn="l">
+              <a:lnSpc>
+                <a:spcPts val="2240"/>
+              </a:lnSpc>
+              <a:buNone/>
+            </a:pPr>
+            <a:r>
+              <a:rPr lang="en-US" sz="1600" dirty="0">
+                <a:solidFill>
+                  <a:srgbClr val="16202E"/>
+                </a:solidFill>
+                <a:latin typeface="Cambria" panose="02040503050406030204" pitchFamily="18" charset="0"/>
+                <a:ea typeface="Cambria" panose="02040503050406030204" pitchFamily="18" charset="0"/>
+                <a:cs typeface="IBM Plex Sans" pitchFamily="34" charset="-120"/>
+              </a:rPr>
+              <a:t>Главная гипотеза пилота: студенты открывают лимит каждый день — это и есть удержание клиента для банка.</a:t>
+            </a:r>
+            <a:endParaRPr lang="en-US" sz="1600" dirty="0">
+              <a:latin typeface="Cambria" panose="02040503050406030204" pitchFamily="18" charset="0"/>
+              <a:ea typeface="Cambria" panose="02040503050406030204" pitchFamily="18" charset="0"/>
+            </a:endParaRPr>
+          </a:p>
+        </p:txBody>
+      </p:sp>
+    </p:spTree>
+  </p:cSld>
+  <p:clrMapOvr>
+    <a:masterClrMapping/>
+  </p:clrMapOvr>
+</p:sld>
+</file>
+
+<file path=ppt/slides/slide11.xml><?xml version="1.0" encoding="utf-8"?>
+<p:sld xmlns:a="http://schemas.openxmlformats.org/drawingml/2006/main" xmlns:r="http://schemas.openxmlformats.org/officeDocument/2006/relationships" xmlns:p="http://schemas.openxmlformats.org/presentationml/2006/main">
+  <p:cSld name="Slide 9">
+    <p:bg>
+      <p:bgPr>
+        <a:solidFill>
+          <a:srgbClr val="F6F3EC"/>
+        </a:solidFill>
+        <a:effectLst/>
+      </p:bgPr>
+    </p:bg>
+    <p:spTree>
+      <p:nvGrpSpPr>
+        <p:cNvPr id="1" name=""/>
+        <p:cNvGrpSpPr/>
+        <p:nvPr/>
+      </p:nvGrpSpPr>
+      <p:grpSpPr>
+        <a:xfrm>
+          <a:off x="0" y="0"/>
+          <a:ext cx="0" cy="0"/>
+          <a:chOff x="0" y="0"/>
+          <a:chExt cx="0" cy="0"/>
+        </a:xfrm>
+      </p:grpSpPr>
+      <p:sp>
+        <p:nvSpPr>
+          <p:cNvPr id="2" name="Text 0"/>
+          <p:cNvSpPr/>
+          <p:nvPr/>
+        </p:nvSpPr>
+        <p:spPr>
+          <a:xfrm>
+            <a:off x="812800" y="812800"/>
+            <a:ext cx="10883392" cy="528320"/>
+          </a:xfrm>
+          <a:prstGeom prst="rect">
+            <a:avLst/>
+          </a:prstGeom>
+          <a:noFill/>
+          <a:ln/>
+        </p:spPr>
+        <p:txBody>
+          <a:bodyPr wrap="square" lIns="0" tIns="0" rIns="0" bIns="0" rtlCol="0" anchor="t">
+            <a:normAutofit/>
+          </a:bodyPr>
+          <a:lstStyle/>
+          <a:p>
+            <a:pPr marL="0" indent="0" algn="l">
+              <a:lnSpc>
+                <a:spcPts val="3960"/>
+              </a:lnSpc>
+              <a:buNone/>
+            </a:pPr>
+            <a:r>
+              <a:rPr lang="en-US" sz="3600" b="1" dirty="0">
+                <a:solidFill>
+                  <a:srgbClr val="16202E"/>
+                </a:solidFill>
+                <a:latin typeface="Times New Roman" panose="02020603050405020304" pitchFamily="18" charset="0"/>
+                <a:ea typeface="Rubik" pitchFamily="34" charset="-122"/>
+                <a:cs typeface="Times New Roman" panose="02020603050405020304" pitchFamily="18" charset="0"/>
+              </a:rPr>
+              <a:t>Итог</a:t>
+            </a:r>
+            <a:endParaRPr lang="en-US" sz="3600" dirty="0">
+              <a:latin typeface="Times New Roman" panose="02020603050405020304" pitchFamily="18" charset="0"/>
+              <a:cs typeface="Times New Roman" panose="02020603050405020304" pitchFamily="18" charset="0"/>
+            </a:endParaRPr>
+          </a:p>
+        </p:txBody>
+      </p:sp>
+      <p:sp>
+        <p:nvSpPr>
+          <p:cNvPr id="3" name="Text 1"/>
+          <p:cNvSpPr/>
+          <p:nvPr/>
+        </p:nvSpPr>
+        <p:spPr>
+          <a:xfrm>
+            <a:off x="812800" y="1620520"/>
+            <a:ext cx="5839247" cy="2258906"/>
+          </a:xfrm>
+          <a:prstGeom prst="rect">
+            <a:avLst/>
+          </a:prstGeom>
+          <a:noFill/>
+          <a:ln/>
+        </p:spPr>
+        <p:txBody>
+          <a:bodyPr wrap="square" lIns="0" tIns="0" rIns="0" bIns="0" rtlCol="0" anchor="t">
+            <a:normAutofit/>
+          </a:bodyPr>
+          <a:lstStyle/>
+          <a:p>
+            <a:pPr marL="0" indent="0" algn="l">
+              <a:lnSpc>
+                <a:spcPts val="2240"/>
+              </a:lnSpc>
+              <a:buNone/>
+            </a:pPr>
+            <a:r>
+              <a:rPr lang="en-US" sz="1700" b="1" dirty="0">
+                <a:solidFill>
+                  <a:srgbClr val="B25A06"/>
+                </a:solidFill>
+                <a:latin typeface="Cambria" panose="02040503050406030204" pitchFamily="18" charset="0"/>
+                <a:ea typeface="Cambria" panose="02040503050406030204" pitchFamily="18" charset="0"/>
+                <a:cs typeface="IBM Plex Sans" pitchFamily="34" charset="-120"/>
+              </a:rPr>
+              <a:t>Проблема.</a:t>
+            </a:r>
+            <a:r>
+              <a:rPr lang="en-US" sz="1700" dirty="0">
+                <a:solidFill>
+                  <a:srgbClr val="16202E"/>
+                </a:solidFill>
+                <a:latin typeface="Cambria" panose="02040503050406030204" pitchFamily="18" charset="0"/>
+                <a:ea typeface="Cambria" panose="02040503050406030204" pitchFamily="18" charset="0"/>
+                <a:cs typeface="IBM Plex Sans" pitchFamily="34" charset="-120"/>
+              </a:rPr>
+              <a:t> 1,6 млн студентов с нерегулярным доходом не знают, сколько можно тратить до следующего поступления.</a:t>
+            </a:r>
+            <a:endParaRPr lang="en-US" sz="1700" dirty="0">
+              <a:latin typeface="Cambria" panose="02040503050406030204" pitchFamily="18" charset="0"/>
+              <a:ea typeface="Cambria" panose="02040503050406030204" pitchFamily="18" charset="0"/>
+            </a:endParaRPr>
+          </a:p>
+        </p:txBody>
+      </p:sp>
+      <p:sp>
+        <p:nvSpPr>
+          <p:cNvPr id="4" name="Text 2"/>
+          <p:cNvSpPr/>
+          <p:nvPr/>
+        </p:nvSpPr>
+        <p:spPr>
+          <a:xfrm>
+            <a:off x="812800" y="2520266"/>
+            <a:ext cx="5839247" cy="2258906"/>
+          </a:xfrm>
+          <a:prstGeom prst="rect">
+            <a:avLst/>
+          </a:prstGeom>
+          <a:noFill/>
+          <a:ln/>
+        </p:spPr>
+        <p:txBody>
+          <a:bodyPr wrap="square" lIns="0" tIns="0" rIns="0" bIns="0" rtlCol="0" anchor="t">
+            <a:normAutofit/>
+          </a:bodyPr>
+          <a:lstStyle/>
+          <a:p>
+            <a:pPr marL="0" indent="0" algn="l">
+              <a:lnSpc>
+                <a:spcPts val="2240"/>
+              </a:lnSpc>
+              <a:buNone/>
+            </a:pPr>
+            <a:r>
+              <a:rPr lang="en-US" sz="1700" b="1" dirty="0">
+                <a:solidFill>
+                  <a:srgbClr val="B25A06"/>
+                </a:solidFill>
+                <a:latin typeface="Cambria" panose="02040503050406030204" pitchFamily="18" charset="0"/>
+                <a:ea typeface="Cambria" panose="02040503050406030204" pitchFamily="18" charset="0"/>
+                <a:cs typeface="IBM Plex Sans" pitchFamily="34" charset="-120"/>
+              </a:rPr>
+              <a:t>Решение.</a:t>
+            </a:r>
+            <a:r>
+              <a:rPr lang="en-US" sz="1700" dirty="0">
+                <a:solidFill>
+                  <a:srgbClr val="16202E"/>
+                </a:solidFill>
+                <a:latin typeface="Cambria" panose="02040503050406030204" pitchFamily="18" charset="0"/>
+                <a:ea typeface="Cambria" panose="02040503050406030204" pitchFamily="18" charset="0"/>
+                <a:cs typeface="IBM Plex Sans" pitchFamily="34" charset="-120"/>
+              </a:rPr>
+              <a:t> Одна цифра на сегодня: GigaChat понимает вопрос, код считает, ответ объясняет допущения.</a:t>
+            </a:r>
+            <a:endParaRPr lang="en-US" sz="1700" dirty="0">
+              <a:latin typeface="Cambria" panose="02040503050406030204" pitchFamily="18" charset="0"/>
+              <a:ea typeface="Cambria" panose="02040503050406030204" pitchFamily="18" charset="0"/>
+            </a:endParaRPr>
+          </a:p>
+        </p:txBody>
+      </p:sp>
+      <p:sp>
+        <p:nvSpPr>
+          <p:cNvPr id="5" name="Text 3"/>
+          <p:cNvSpPr/>
+          <p:nvPr/>
+        </p:nvSpPr>
+        <p:spPr>
+          <a:xfrm>
+            <a:off x="812800" y="3254329"/>
+            <a:ext cx="5839247" cy="2258906"/>
+          </a:xfrm>
+          <a:prstGeom prst="rect">
+            <a:avLst/>
+          </a:prstGeom>
+          <a:noFill/>
+          <a:ln/>
+        </p:spPr>
+        <p:txBody>
+          <a:bodyPr wrap="square" lIns="0" tIns="0" rIns="0" bIns="0" rtlCol="0" anchor="t">
+            <a:normAutofit/>
+          </a:bodyPr>
+          <a:lstStyle/>
+          <a:p>
+            <a:pPr marL="0" indent="0" algn="l">
+              <a:lnSpc>
+                <a:spcPts val="2240"/>
+              </a:lnSpc>
+              <a:buNone/>
+            </a:pPr>
+            <a:r>
+              <a:rPr lang="en-US" sz="1700" b="1" dirty="0">
+                <a:solidFill>
+                  <a:srgbClr val="B25A06"/>
+                </a:solidFill>
+                <a:latin typeface="Cambria" panose="02040503050406030204" pitchFamily="18" charset="0"/>
+                <a:ea typeface="Cambria" panose="02040503050406030204" pitchFamily="18" charset="0"/>
+                <a:cs typeface="IBM Plex Sans" pitchFamily="34" charset="-120"/>
+              </a:rPr>
+              <a:t>Ценность для студента.</a:t>
+            </a:r>
+            <a:r>
+              <a:rPr lang="en-US" sz="1700" dirty="0">
+                <a:solidFill>
+                  <a:srgbClr val="16202E"/>
+                </a:solidFill>
+                <a:latin typeface="Cambria" panose="02040503050406030204" pitchFamily="18" charset="0"/>
+                <a:ea typeface="Cambria" panose="02040503050406030204" pitchFamily="18" charset="0"/>
+                <a:cs typeface="IBM Plex Sans" pitchFamily="34" charset="-120"/>
+              </a:rPr>
+              <a:t> Нехватка денег видна заранее, а не в последний день,  есть время решить, что урезать.</a:t>
+            </a:r>
+            <a:endParaRPr lang="en-US" sz="1700" dirty="0">
+              <a:latin typeface="Cambria" panose="02040503050406030204" pitchFamily="18" charset="0"/>
+              <a:ea typeface="Cambria" panose="02040503050406030204" pitchFamily="18" charset="0"/>
+            </a:endParaRPr>
+          </a:p>
+        </p:txBody>
+      </p:sp>
+      <p:sp>
+        <p:nvSpPr>
+          <p:cNvPr id="6" name="Text 4"/>
+          <p:cNvSpPr/>
+          <p:nvPr/>
+        </p:nvSpPr>
+        <p:spPr>
+          <a:xfrm>
+            <a:off x="838200" y="3988387"/>
+            <a:ext cx="5621867" cy="1927537"/>
+          </a:xfrm>
+          <a:prstGeom prst="rect">
+            <a:avLst/>
+          </a:prstGeom>
+          <a:noFill/>
+          <a:ln/>
+        </p:spPr>
+        <p:txBody>
+          <a:bodyPr wrap="square" lIns="0" tIns="0" rIns="0" bIns="0" rtlCol="0" anchor="t">
+            <a:normAutofit/>
+          </a:bodyPr>
+          <a:lstStyle/>
+          <a:p>
+            <a:pPr marL="0" indent="0" algn="l">
+              <a:lnSpc>
+                <a:spcPts val="2240"/>
+              </a:lnSpc>
+              <a:buNone/>
+            </a:pPr>
+            <a:r>
+              <a:rPr lang="en-US" sz="1700" b="1" dirty="0">
+                <a:solidFill>
+                  <a:srgbClr val="B25A06"/>
+                </a:solidFill>
+                <a:latin typeface="Cambria" panose="02040503050406030204" pitchFamily="18" charset="0"/>
+                <a:ea typeface="Cambria" panose="02040503050406030204" pitchFamily="18" charset="0"/>
+                <a:cs typeface="IBM Plex Sans" pitchFamily="34" charset="-120"/>
+              </a:rPr>
+              <a:t>Для Т-Банка.</a:t>
+            </a:r>
+            <a:r>
+              <a:rPr lang="en-US" sz="1700" dirty="0">
+                <a:solidFill>
+                  <a:srgbClr val="16202E"/>
+                </a:solidFill>
+                <a:latin typeface="Cambria" panose="02040503050406030204" pitchFamily="18" charset="0"/>
+                <a:ea typeface="Cambria" panose="02040503050406030204" pitchFamily="18" charset="0"/>
+                <a:cs typeface="IBM Plex Sans" pitchFamily="34" charset="-120"/>
+              </a:rPr>
+              <a:t> Лояльные молодые клиенты и +3,7 млн ₽ в базовом сценарии пилота.</a:t>
+            </a:r>
+            <a:endParaRPr lang="en-US" sz="1700" dirty="0">
+              <a:latin typeface="Cambria" panose="02040503050406030204" pitchFamily="18" charset="0"/>
+              <a:ea typeface="Cambria" panose="02040503050406030204" pitchFamily="18" charset="0"/>
+            </a:endParaRPr>
+          </a:p>
+        </p:txBody>
+      </p:sp>
+      <p:sp>
+        <p:nvSpPr>
+          <p:cNvPr id="7" name="Text 5"/>
+          <p:cNvSpPr/>
+          <p:nvPr/>
+        </p:nvSpPr>
+        <p:spPr>
+          <a:xfrm>
+            <a:off x="812800" y="4665730"/>
+            <a:ext cx="5545667" cy="1159337"/>
+          </a:xfrm>
+          <a:prstGeom prst="rect">
+            <a:avLst/>
+          </a:prstGeom>
+          <a:noFill/>
+          <a:ln/>
+        </p:spPr>
+        <p:txBody>
+          <a:bodyPr wrap="square" lIns="0" tIns="0" rIns="0" bIns="0" rtlCol="0" anchor="t">
+            <a:normAutofit/>
+          </a:bodyPr>
+          <a:lstStyle/>
+          <a:p>
+            <a:pPr marL="0" indent="0" algn="l">
+              <a:lnSpc>
+                <a:spcPts val="1820"/>
+              </a:lnSpc>
+              <a:buNone/>
+            </a:pPr>
+            <a:r>
+              <a:rPr lang="en-US" sz="1600" dirty="0">
+                <a:solidFill>
+                  <a:srgbClr val="4A5566"/>
+                </a:solidFill>
+                <a:latin typeface="Cambria" panose="02040503050406030204" pitchFamily="18" charset="0"/>
+                <a:ea typeface="Cambria" panose="02040503050406030204" pitchFamily="18" charset="0"/>
+                <a:cs typeface="IBM Plex Sans" pitchFamily="34" charset="-120"/>
+              </a:rPr>
+              <a:t>Ограничения: не увеличивает </a:t>
+            </a:r>
+            <a:r>
+              <a:rPr lang="en-US" sz="1600" dirty="0" err="1">
+                <a:solidFill>
+                  <a:srgbClr val="4A5566"/>
+                </a:solidFill>
+                <a:latin typeface="Cambria" panose="02040503050406030204" pitchFamily="18" charset="0"/>
+                <a:ea typeface="Cambria" panose="02040503050406030204" pitchFamily="18" charset="0"/>
+                <a:cs typeface="IBM Plex Sans" pitchFamily="34" charset="-120"/>
+              </a:rPr>
+              <a:t>доход</a:t>
+            </a:r>
+            <a:r>
+              <a:rPr lang="en-US" sz="1600" dirty="0">
+                <a:solidFill>
+                  <a:srgbClr val="4A5566"/>
+                </a:solidFill>
+                <a:latin typeface="Cambria" panose="02040503050406030204" pitchFamily="18" charset="0"/>
+                <a:ea typeface="Cambria" panose="02040503050406030204" pitchFamily="18" charset="0"/>
+                <a:cs typeface="IBM Plex Sans" pitchFamily="34" charset="-120"/>
+              </a:rPr>
+              <a:t>  заранее </a:t>
+            </a:r>
+            <a:r>
+              <a:rPr lang="en-US" sz="1600" dirty="0" err="1">
+                <a:solidFill>
+                  <a:srgbClr val="4A5566"/>
+                </a:solidFill>
+                <a:latin typeface="Cambria" panose="02040503050406030204" pitchFamily="18" charset="0"/>
+                <a:ea typeface="Cambria" panose="02040503050406030204" pitchFamily="18" charset="0"/>
+                <a:cs typeface="IBM Plex Sans" pitchFamily="34" charset="-120"/>
+              </a:rPr>
+              <a:t>показывает</a:t>
+            </a:r>
+            <a:r>
+              <a:rPr lang="en-US" sz="1600" dirty="0">
+                <a:solidFill>
+                  <a:srgbClr val="4A5566"/>
+                </a:solidFill>
+                <a:latin typeface="Cambria" panose="02040503050406030204" pitchFamily="18" charset="0"/>
+                <a:ea typeface="Cambria" panose="02040503050406030204" pitchFamily="18" charset="0"/>
+                <a:cs typeface="IBM Plex Sans" pitchFamily="34" charset="-120"/>
+              </a:rPr>
+              <a:t> </a:t>
+            </a:r>
+            <a:r>
+              <a:rPr lang="en-US" sz="1600" dirty="0" err="1">
+                <a:solidFill>
+                  <a:srgbClr val="4A5566"/>
+                </a:solidFill>
+                <a:latin typeface="Cambria" panose="02040503050406030204" pitchFamily="18" charset="0"/>
+                <a:ea typeface="Cambria" panose="02040503050406030204" pitchFamily="18" charset="0"/>
+                <a:cs typeface="IBM Plex Sans" pitchFamily="34" charset="-120"/>
+              </a:rPr>
+              <a:t>дефицит</a:t>
+            </a:r>
+            <a:r>
+              <a:rPr lang="ru-RU" sz="1600" dirty="0">
+                <a:solidFill>
+                  <a:srgbClr val="4A5566"/>
+                </a:solidFill>
+                <a:latin typeface="Cambria" panose="02040503050406030204" pitchFamily="18" charset="0"/>
+                <a:ea typeface="Cambria" panose="02040503050406030204" pitchFamily="18" charset="0"/>
+                <a:cs typeface="IBM Plex Sans" pitchFamily="34" charset="-120"/>
+              </a:rPr>
+              <a:t>,</a:t>
+            </a:r>
+            <a:r>
+              <a:rPr lang="en-US" sz="1600" dirty="0">
+                <a:solidFill>
+                  <a:srgbClr val="4A5566"/>
+                </a:solidFill>
+                <a:latin typeface="Cambria" panose="02040503050406030204" pitchFamily="18" charset="0"/>
+                <a:ea typeface="Cambria" panose="02040503050406030204" pitchFamily="18" charset="0"/>
+                <a:cs typeface="IBM Plex Sans" pitchFamily="34" charset="-120"/>
+              </a:rPr>
+              <a:t> работает на </a:t>
+            </a:r>
+            <a:r>
+              <a:rPr lang="en-US" sz="1600" dirty="0" err="1">
+                <a:solidFill>
+                  <a:srgbClr val="4A5566"/>
+                </a:solidFill>
+                <a:latin typeface="Cambria" panose="02040503050406030204" pitchFamily="18" charset="0"/>
+                <a:ea typeface="Cambria" panose="02040503050406030204" pitchFamily="18" charset="0"/>
+                <a:cs typeface="IBM Plex Sans" pitchFamily="34" charset="-120"/>
+              </a:rPr>
+              <a:t>синтетических</a:t>
+            </a:r>
+            <a:r>
+              <a:rPr lang="en-US" sz="1600" dirty="0">
+                <a:solidFill>
+                  <a:srgbClr val="4A5566"/>
+                </a:solidFill>
+                <a:latin typeface="Cambria" panose="02040503050406030204" pitchFamily="18" charset="0"/>
+                <a:ea typeface="Cambria" panose="02040503050406030204" pitchFamily="18" charset="0"/>
+                <a:cs typeface="IBM Plex Sans" pitchFamily="34" charset="-120"/>
+              </a:rPr>
+              <a:t> </a:t>
+            </a:r>
+            <a:r>
+              <a:rPr lang="en-US" sz="1600" dirty="0" err="1">
+                <a:solidFill>
+                  <a:srgbClr val="4A5566"/>
+                </a:solidFill>
+                <a:latin typeface="Cambria" panose="02040503050406030204" pitchFamily="18" charset="0"/>
+                <a:ea typeface="Cambria" panose="02040503050406030204" pitchFamily="18" charset="0"/>
+                <a:cs typeface="IBM Plex Sans" pitchFamily="34" charset="-120"/>
+              </a:rPr>
+              <a:t>данных</a:t>
+            </a:r>
+            <a:r>
+              <a:rPr lang="ru-RU" sz="1600" dirty="0">
+                <a:solidFill>
+                  <a:srgbClr val="4A5566"/>
+                </a:solidFill>
+                <a:latin typeface="Cambria" panose="02040503050406030204" pitchFamily="18" charset="0"/>
+                <a:ea typeface="Cambria" panose="02040503050406030204" pitchFamily="18" charset="0"/>
+                <a:cs typeface="IBM Plex Sans" pitchFamily="34" charset="-120"/>
+              </a:rPr>
+              <a:t>,</a:t>
+            </a:r>
+            <a:r>
+              <a:rPr lang="en-US" sz="1600" dirty="0">
+                <a:solidFill>
+                  <a:srgbClr val="4A5566"/>
+                </a:solidFill>
+                <a:latin typeface="Cambria" panose="02040503050406030204" pitchFamily="18" charset="0"/>
+                <a:ea typeface="Cambria" panose="02040503050406030204" pitchFamily="18" charset="0"/>
+                <a:cs typeface="IBM Plex Sans" pitchFamily="34" charset="-120"/>
+              </a:rPr>
+              <a:t> не даёт инвестиционных советов и не проводит операций.</a:t>
+            </a:r>
+            <a:endParaRPr lang="en-US" sz="1600" dirty="0">
+              <a:latin typeface="Cambria" panose="02040503050406030204" pitchFamily="18" charset="0"/>
+              <a:ea typeface="Cambria" panose="02040503050406030204" pitchFamily="18" charset="0"/>
+            </a:endParaRPr>
+          </a:p>
+        </p:txBody>
+      </p:sp>
+      <p:sp>
+        <p:nvSpPr>
+          <p:cNvPr id="8" name="Shape 6"/>
+          <p:cNvSpPr/>
+          <p:nvPr/>
+        </p:nvSpPr>
+        <p:spPr>
+          <a:xfrm>
+            <a:off x="7721811" y="1563369"/>
+            <a:ext cx="3652097" cy="3652097"/>
+          </a:xfrm>
+          <a:prstGeom prst="roundRect">
+            <a:avLst>
+              <a:gd name="adj" fmla="val 6425"/>
+            </a:avLst>
+          </a:prstGeom>
+          <a:solidFill>
+            <a:srgbClr val="FDFBF6"/>
+          </a:solidFill>
+          <a:ln w="12700">
+            <a:solidFill>
+              <a:srgbClr val="D9D2C3"/>
+            </a:solidFill>
+            <a:prstDash val="dash"/>
+          </a:ln>
+        </p:spPr>
+      </p:sp>
+      <p:sp>
+        <p:nvSpPr>
+          <p:cNvPr id="9" name="Text 7"/>
+          <p:cNvSpPr/>
+          <p:nvPr/>
+        </p:nvSpPr>
+        <p:spPr>
+          <a:xfrm>
+            <a:off x="8791574" y="3154680"/>
+            <a:ext cx="1512570" cy="274320"/>
+          </a:xfrm>
+          <a:prstGeom prst="rect">
+            <a:avLst/>
+          </a:prstGeom>
+          <a:noFill/>
+          <a:ln/>
+        </p:spPr>
+        <p:txBody>
+          <a:bodyPr wrap="square" lIns="0" tIns="0" rIns="0" bIns="0" rtlCol="0" anchor="t">
+            <a:normAutofit/>
+          </a:bodyPr>
+          <a:lstStyle/>
+          <a:p>
+            <a:pPr marL="0" indent="0" algn="ctr">
+              <a:lnSpc>
+                <a:spcPts val="1960"/>
+              </a:lnSpc>
+              <a:buNone/>
+            </a:pPr>
+            <a:r>
+              <a:rPr lang="en-US" sz="1400" dirty="0">
+                <a:solidFill>
+                  <a:srgbClr val="5F6877"/>
+                </a:solidFill>
+                <a:latin typeface="IBM Plex Sans" pitchFamily="34" charset="0"/>
+                <a:ea typeface="IBM Plex Sans" pitchFamily="34" charset="-122"/>
+                <a:cs typeface="IBM Plex Sans" pitchFamily="34" charset="-120"/>
+              </a:rPr>
+              <a:t>[QR-код на отчёт]</a:t>
+            </a:r>
+            <a:endParaRPr lang="en-US" sz="1400" dirty="0"/>
+          </a:p>
+        </p:txBody>
+      </p:sp>
+      <p:sp>
+        <p:nvSpPr>
+          <p:cNvPr id="10" name="Text 8"/>
+          <p:cNvSpPr/>
+          <p:nvPr/>
+        </p:nvSpPr>
+        <p:spPr>
+          <a:xfrm>
+            <a:off x="7803383" y="5425861"/>
+            <a:ext cx="3488952" cy="1213197"/>
+          </a:xfrm>
+          <a:prstGeom prst="rect">
+            <a:avLst/>
+          </a:prstGeom>
+          <a:noFill/>
+          <a:ln/>
+        </p:spPr>
+        <p:txBody>
+          <a:bodyPr wrap="square" lIns="0" tIns="0" rIns="0" bIns="0" rtlCol="0" anchor="t">
+            <a:normAutofit fontScale="92500"/>
+          </a:bodyPr>
+          <a:lstStyle/>
+          <a:p>
+            <a:pPr algn="ctr">
+              <a:lnSpc>
+                <a:spcPts val="1950"/>
+              </a:lnSpc>
+            </a:pPr>
+            <a:r>
+              <a:rPr lang="en-US" sz="1600" dirty="0">
+                <a:solidFill>
+                  <a:srgbClr val="4A5566"/>
+                </a:solidFill>
+                <a:latin typeface="Cambria" panose="02040503050406030204" pitchFamily="18" charset="0"/>
+                <a:ea typeface="Cambria" panose="02040503050406030204" pitchFamily="18" charset="0"/>
+                <a:cs typeface="IBM Plex Sans" pitchFamily="34" charset="-120"/>
+              </a:rPr>
+              <a:t>GitHub: </a:t>
+            </a:r>
+            <a:r>
+              <a:rPr lang="en-US" sz="1600" dirty="0">
+                <a:solidFill>
+                  <a:srgbClr val="4A5566"/>
+                </a:solidFill>
+                <a:latin typeface="Cambria" panose="02040503050406030204" pitchFamily="18" charset="0"/>
+                <a:ea typeface="Cambria" panose="02040503050406030204" pitchFamily="18" charset="0"/>
+                <a:cs typeface="IBM Plex Sans" pitchFamily="34" charset="-120"/>
+                <a:hlinkClick r:id="rId3"/>
+              </a:rPr>
+              <a:t>https://github.com/Tvorog108/Xakaton_27_09_27</a:t>
+            </a:r>
+            <a:endParaRPr lang="ru-RU" sz="1600" dirty="0">
+              <a:solidFill>
+                <a:srgbClr val="4A5566"/>
+              </a:solidFill>
+              <a:latin typeface="Cambria" panose="02040503050406030204" pitchFamily="18" charset="0"/>
+              <a:ea typeface="Cambria" panose="02040503050406030204" pitchFamily="18" charset="0"/>
+              <a:cs typeface="IBM Plex Sans" pitchFamily="34" charset="-120"/>
+            </a:endParaRPr>
+          </a:p>
+          <a:p>
+            <a:pPr algn="ctr">
+              <a:lnSpc>
+                <a:spcPts val="1950"/>
+              </a:lnSpc>
+            </a:pPr>
+            <a:r>
+              <a:rPr lang="en-US" sz="1600" dirty="0">
+                <a:solidFill>
+                  <a:srgbClr val="4A5566"/>
+                </a:solidFill>
+                <a:latin typeface="Cambria" panose="02040503050406030204" pitchFamily="18" charset="0"/>
+                <a:ea typeface="Cambria" panose="02040503050406030204" pitchFamily="18" charset="0"/>
+                <a:cs typeface="IBM Plex Sans" pitchFamily="34" charset="-120"/>
+              </a:rPr>
+              <a:t>Telegram </a:t>
+            </a:r>
+            <a:r>
+              <a:rPr lang="en-US" sz="1600" dirty="0" err="1">
+                <a:solidFill>
+                  <a:srgbClr val="4A5566"/>
+                </a:solidFill>
+                <a:latin typeface="Cambria" panose="02040503050406030204" pitchFamily="18" charset="0"/>
+                <a:ea typeface="Cambria" panose="02040503050406030204" pitchFamily="18" charset="0"/>
+                <a:cs typeface="IBM Plex Sans" pitchFamily="34" charset="-120"/>
+              </a:rPr>
+              <a:t>капитана</a:t>
+            </a:r>
+            <a:r>
+              <a:rPr lang="en-US" sz="1600" dirty="0">
+                <a:solidFill>
+                  <a:srgbClr val="4A5566"/>
+                </a:solidFill>
+                <a:latin typeface="Cambria" panose="02040503050406030204" pitchFamily="18" charset="0"/>
+                <a:ea typeface="Cambria" panose="02040503050406030204" pitchFamily="18" charset="0"/>
+                <a:cs typeface="IBM Plex Sans" pitchFamily="34" charset="-120"/>
+              </a:rPr>
+              <a:t>: @SergeevBogdan123</a:t>
+            </a:r>
+            <a:endParaRPr lang="en-US" sz="1600" dirty="0">
+              <a:latin typeface="Cambria" panose="02040503050406030204" pitchFamily="18" charset="0"/>
+              <a:ea typeface="Cambria" panose="02040503050406030204" pitchFamily="18" charset="0"/>
+            </a:endParaRPr>
+          </a:p>
+        </p:txBody>
+      </p:sp>
+      <p:pic>
+        <p:nvPicPr>
+          <p:cNvPr id="12" name="Рисунок 11">
+            <a:extLst>
+              <a:ext uri="{FF2B5EF4-FFF2-40B4-BE49-F238E27FC236}">
+                <a16:creationId xmlns:a16="http://schemas.microsoft.com/office/drawing/2014/main" id="{2E2BEC40-2321-4F0F-B62C-7E6BDB686B05}"/>
+              </a:ext>
+            </a:extLst>
+          </p:cNvPr>
+          <p:cNvPicPr>
+            <a:picLocks noChangeAspect="1"/>
+          </p:cNvPicPr>
+          <p:nvPr/>
+        </p:nvPicPr>
+        <p:blipFill>
+          <a:blip r:embed="rId4"/>
+          <a:stretch>
+            <a:fillRect/>
+          </a:stretch>
+        </p:blipFill>
+        <p:spPr>
+          <a:xfrm>
+            <a:off x="7721811" y="1395305"/>
+            <a:ext cx="3793067" cy="3899325"/>
+          </a:xfrm>
+          <a:prstGeom prst="rect">
+            <a:avLst/>
+          </a:prstGeom>
+        </p:spPr>
+      </p:pic>
+    </p:spTree>
+  </p:cSld>
+  <p:clrMapOvr>
+    <a:masterClrMapping/>
+  </p:clrMapOvr>
+</p:sld>
+</file>
+
 <file path=ppt/slides/slide2.xml><?xml version="1.0" encoding="utf-8"?>
 <p:sld xmlns:a="http://schemas.openxmlformats.org/drawingml/2006/main" xmlns:r="http://schemas.openxmlformats.org/officeDocument/2006/relationships" xmlns:p="http://schemas.openxmlformats.org/presentationml/2006/main">
   <p:cSld name="Slide 2">
@@ -5354,6 +6987,320 @@
 
 <file path=ppt/slides/slide6.xml><?xml version="1.0" encoding="utf-8"?>
 <p:sld xmlns:a="http://schemas.openxmlformats.org/drawingml/2006/main" xmlns:r="http://schemas.openxmlformats.org/officeDocument/2006/relationships" xmlns:p="http://schemas.openxmlformats.org/presentationml/2006/main">
+  <p:cSld>
+    <p:bg>
+      <p:bgPr>
+        <a:solidFill>
+          <a:srgbClr val="F6F3EC"/>
+        </a:solidFill>
+        <a:effectLst/>
+      </p:bgPr>
+    </p:bg>
+    <p:spTree>
+      <p:nvGrpSpPr>
+        <p:cNvPr id="1" name=""/>
+        <p:cNvGrpSpPr/>
+        <p:nvPr/>
+      </p:nvGrpSpPr>
+      <p:grpSpPr>
+        <a:xfrm>
+          <a:off x="0" y="0"/>
+          <a:ext cx="0" cy="0"/>
+          <a:chOff x="0" y="0"/>
+          <a:chExt cx="0" cy="0"/>
+        </a:xfrm>
+      </p:grpSpPr>
+      <p:sp>
+        <p:nvSpPr>
+          <p:cNvPr id="2" name="Text 0"/>
+          <p:cNvSpPr/>
+          <p:nvPr/>
+        </p:nvSpPr>
+        <p:spPr>
+          <a:xfrm>
+            <a:off x="320693" y="136659"/>
+            <a:ext cx="10883392" cy="528320"/>
+          </a:xfrm>
+          <a:prstGeom prst="rect">
+            <a:avLst/>
+          </a:prstGeom>
+          <a:noFill/>
+          <a:ln/>
+        </p:spPr>
+        <p:txBody>
+          <a:bodyPr wrap="square" lIns="0" tIns="0" rIns="0" bIns="0" rtlCol="0" anchor="t">
+            <a:normAutofit/>
+          </a:bodyPr>
+          <a:lstStyle/>
+          <a:p>
+            <a:pPr marL="0" indent="0" algn="l">
+              <a:lnSpc>
+                <a:spcPts val="3960"/>
+              </a:lnSpc>
+              <a:buNone/>
+            </a:pPr>
+            <a:r>
+              <a:rPr lang="en-US" sz="3600" b="1" dirty="0">
+                <a:solidFill>
+                  <a:srgbClr val="16202E"/>
+                </a:solidFill>
+                <a:latin typeface="Rubik" pitchFamily="34" charset="0"/>
+                <a:ea typeface="Rubik" pitchFamily="34" charset="-122"/>
+                <a:cs typeface="Rubik" pitchFamily="34" charset="-120"/>
+              </a:rPr>
+              <a:t>MVP: что уже работает</a:t>
+            </a:r>
+            <a:endParaRPr lang="en-US" sz="3600" dirty="0"/>
+          </a:p>
+        </p:txBody>
+      </p:sp>
+      <p:pic>
+        <p:nvPicPr>
+          <p:cNvPr id="7" name="Рисунок 6">
+            <a:extLst>
+              <a:ext uri="{FF2B5EF4-FFF2-40B4-BE49-F238E27FC236}">
+                <a16:creationId xmlns:a16="http://schemas.microsoft.com/office/drawing/2014/main" id="{90790094-AE15-41F5-978F-F2F359BB2793}"/>
+              </a:ext>
+            </a:extLst>
+          </p:cNvPr>
+          <p:cNvPicPr>
+            <a:picLocks noChangeAspect="1"/>
+          </p:cNvPicPr>
+          <p:nvPr/>
+        </p:nvPicPr>
+        <p:blipFill>
+          <a:blip r:embed="rId3"/>
+          <a:stretch>
+            <a:fillRect/>
+          </a:stretch>
+        </p:blipFill>
+        <p:spPr>
+          <a:xfrm>
+            <a:off x="82807" y="970475"/>
+            <a:ext cx="5610844" cy="3846223"/>
+          </a:xfrm>
+          <a:prstGeom prst="rect">
+            <a:avLst/>
+          </a:prstGeom>
+        </p:spPr>
+      </p:pic>
+      <p:pic>
+        <p:nvPicPr>
+          <p:cNvPr id="17" name="Рисунок 16">
+            <a:extLst>
+              <a:ext uri="{FF2B5EF4-FFF2-40B4-BE49-F238E27FC236}">
+                <a16:creationId xmlns:a16="http://schemas.microsoft.com/office/drawing/2014/main" id="{BC089328-9562-4A7E-AAE3-6B7305983204}"/>
+              </a:ext>
+            </a:extLst>
+          </p:cNvPr>
+          <p:cNvPicPr>
+            <a:picLocks noChangeAspect="1"/>
+          </p:cNvPicPr>
+          <p:nvPr/>
+        </p:nvPicPr>
+        <p:blipFill>
+          <a:blip r:embed="rId4"/>
+          <a:stretch>
+            <a:fillRect/>
+          </a:stretch>
+        </p:blipFill>
+        <p:spPr>
+          <a:xfrm>
+            <a:off x="5895197" y="136659"/>
+            <a:ext cx="5803374" cy="2954271"/>
+          </a:xfrm>
+          <a:prstGeom prst="rect">
+            <a:avLst/>
+          </a:prstGeom>
+        </p:spPr>
+      </p:pic>
+      <p:pic>
+        <p:nvPicPr>
+          <p:cNvPr id="18" name="Рисунок 17">
+            <a:extLst>
+              <a:ext uri="{FF2B5EF4-FFF2-40B4-BE49-F238E27FC236}">
+                <a16:creationId xmlns:a16="http://schemas.microsoft.com/office/drawing/2014/main" id="{84657D1E-FE4D-4AB6-8733-94BAFA581D4B}"/>
+              </a:ext>
+            </a:extLst>
+          </p:cNvPr>
+          <p:cNvPicPr>
+            <a:picLocks noChangeAspect="1"/>
+          </p:cNvPicPr>
+          <p:nvPr/>
+        </p:nvPicPr>
+        <p:blipFill>
+          <a:blip r:embed="rId5"/>
+          <a:stretch>
+            <a:fillRect/>
+          </a:stretch>
+        </p:blipFill>
+        <p:spPr>
+          <a:xfrm>
+            <a:off x="5770762" y="3121696"/>
+            <a:ext cx="6190324" cy="3599645"/>
+          </a:xfrm>
+          <a:prstGeom prst="rect">
+            <a:avLst/>
+          </a:prstGeom>
+        </p:spPr>
+      </p:pic>
+    </p:spTree>
+    <p:extLst>
+      <p:ext uri="{BB962C8B-B14F-4D97-AF65-F5344CB8AC3E}">
+        <p14:creationId xmlns:p14="http://schemas.microsoft.com/office/powerpoint/2010/main" val="731677344"/>
+      </p:ext>
+    </p:extLst>
+  </p:cSld>
+  <p:clrMapOvr>
+    <a:masterClrMapping/>
+  </p:clrMapOvr>
+</p:sld>
+</file>
+
+<file path=ppt/slides/slide7.xml><?xml version="1.0" encoding="utf-8"?>
+<p:sld xmlns:a="http://schemas.openxmlformats.org/drawingml/2006/main" xmlns:r="http://schemas.openxmlformats.org/officeDocument/2006/relationships" xmlns:p="http://schemas.openxmlformats.org/presentationml/2006/main">
+  <p:cSld>
+    <p:bg>
+      <p:bgPr>
+        <a:solidFill>
+          <a:srgbClr val="F6F3EC"/>
+        </a:solidFill>
+        <a:effectLst/>
+      </p:bgPr>
+    </p:bg>
+    <p:spTree>
+      <p:nvGrpSpPr>
+        <p:cNvPr id="1" name=""/>
+        <p:cNvGrpSpPr/>
+        <p:nvPr/>
+      </p:nvGrpSpPr>
+      <p:grpSpPr>
+        <a:xfrm>
+          <a:off x="0" y="0"/>
+          <a:ext cx="0" cy="0"/>
+          <a:chOff x="0" y="0"/>
+          <a:chExt cx="0" cy="0"/>
+        </a:xfrm>
+      </p:grpSpPr>
+      <p:sp>
+        <p:nvSpPr>
+          <p:cNvPr id="2" name="Text 0"/>
+          <p:cNvSpPr/>
+          <p:nvPr/>
+        </p:nvSpPr>
+        <p:spPr>
+          <a:xfrm>
+            <a:off x="320693" y="136659"/>
+            <a:ext cx="10883392" cy="528320"/>
+          </a:xfrm>
+          <a:prstGeom prst="rect">
+            <a:avLst/>
+          </a:prstGeom>
+          <a:noFill/>
+          <a:ln/>
+        </p:spPr>
+        <p:txBody>
+          <a:bodyPr wrap="square" lIns="0" tIns="0" rIns="0" bIns="0" rtlCol="0" anchor="t">
+            <a:normAutofit/>
+          </a:bodyPr>
+          <a:lstStyle/>
+          <a:p>
+            <a:pPr marL="0" indent="0" algn="l">
+              <a:lnSpc>
+                <a:spcPts val="3960"/>
+              </a:lnSpc>
+              <a:buNone/>
+            </a:pPr>
+            <a:r>
+              <a:rPr lang="en-US" sz="3600" b="1" dirty="0">
+                <a:solidFill>
+                  <a:srgbClr val="16202E"/>
+                </a:solidFill>
+                <a:latin typeface="Rubik" pitchFamily="34" charset="0"/>
+                <a:ea typeface="Rubik" pitchFamily="34" charset="-122"/>
+                <a:cs typeface="Rubik" pitchFamily="34" charset="-120"/>
+              </a:rPr>
+              <a:t>MVP: что уже работает</a:t>
+            </a:r>
+            <a:endParaRPr lang="en-US" sz="3600" dirty="0"/>
+          </a:p>
+        </p:txBody>
+      </p:sp>
+      <p:pic>
+        <p:nvPicPr>
+          <p:cNvPr id="3" name="Рисунок 2">
+            <a:extLst>
+              <a:ext uri="{FF2B5EF4-FFF2-40B4-BE49-F238E27FC236}">
+                <a16:creationId xmlns:a16="http://schemas.microsoft.com/office/drawing/2014/main" id="{9B6494A9-1F1F-422E-AD9A-DBAD5BAA29D4}"/>
+              </a:ext>
+            </a:extLst>
+          </p:cNvPr>
+          <p:cNvPicPr>
+            <a:picLocks noChangeAspect="1"/>
+          </p:cNvPicPr>
+          <p:nvPr/>
+        </p:nvPicPr>
+        <p:blipFill>
+          <a:blip r:embed="rId3"/>
+          <a:stretch>
+            <a:fillRect/>
+          </a:stretch>
+        </p:blipFill>
+        <p:spPr>
+          <a:xfrm>
+            <a:off x="168207" y="1566500"/>
+            <a:ext cx="5743196" cy="4093765"/>
+          </a:xfrm>
+          <a:prstGeom prst="rect">
+            <a:avLst/>
+          </a:prstGeom>
+        </p:spPr>
+      </p:pic>
+      <p:pic>
+        <p:nvPicPr>
+          <p:cNvPr id="4" name="Рисунок 3">
+            <a:extLst>
+              <a:ext uri="{FF2B5EF4-FFF2-40B4-BE49-F238E27FC236}">
+                <a16:creationId xmlns:a16="http://schemas.microsoft.com/office/drawing/2014/main" id="{56083025-AE21-4E4E-B2BB-0AC32C54D07E}"/>
+              </a:ext>
+            </a:extLst>
+          </p:cNvPr>
+          <p:cNvPicPr>
+            <a:picLocks noChangeAspect="1"/>
+          </p:cNvPicPr>
+          <p:nvPr/>
+        </p:nvPicPr>
+        <p:blipFill>
+          <a:blip r:embed="rId4"/>
+          <a:stretch>
+            <a:fillRect/>
+          </a:stretch>
+        </p:blipFill>
+        <p:spPr>
+          <a:xfrm>
+            <a:off x="6198737" y="1495666"/>
+            <a:ext cx="5825056" cy="4093765"/>
+          </a:xfrm>
+          <a:prstGeom prst="rect">
+            <a:avLst/>
+          </a:prstGeom>
+        </p:spPr>
+      </p:pic>
+    </p:spTree>
+    <p:extLst>
+      <p:ext uri="{BB962C8B-B14F-4D97-AF65-F5344CB8AC3E}">
+        <p14:creationId xmlns:p14="http://schemas.microsoft.com/office/powerpoint/2010/main" val="1867751038"/>
+      </p:ext>
+    </p:extLst>
+  </p:cSld>
+  <p:clrMapOvr>
+    <a:masterClrMapping/>
+  </p:clrMapOvr>
+</p:sld>
+</file>
+
+<file path=ppt/slides/slide8.xml><?xml version="1.0" encoding="utf-8"?>
+<p:sld xmlns:a="http://schemas.openxmlformats.org/drawingml/2006/main" xmlns:r="http://schemas.openxmlformats.org/officeDocument/2006/relationships" xmlns:p="http://schemas.openxmlformats.org/presentationml/2006/main">
   <p:cSld name="Slide 6">
     <p:bg>
       <p:bgPr>
@@ -6865,7 +8812,7 @@
 </p:sld>
 </file>
 
-<file path=ppt/slides/slide7.xml><?xml version="1.0" encoding="utf-8"?>
+<file path=ppt/slides/slide9.xml><?xml version="1.0" encoding="utf-8"?>
 <p:sld xmlns:a="http://schemas.openxmlformats.org/drawingml/2006/main" xmlns:r="http://schemas.openxmlformats.org/officeDocument/2006/relationships" xmlns:p="http://schemas.openxmlformats.org/presentationml/2006/main">
   <p:cSld name="Slide 7">
     <p:bg>
@@ -7849,1463 +9796,6 @@
           </a:p>
         </p:txBody>
       </p:sp>
-    </p:spTree>
-  </p:cSld>
-  <p:clrMapOvr>
-    <a:masterClrMapping/>
-  </p:clrMapOvr>
-</p:sld>
-</file>
-
-<file path=ppt/slides/slide8.xml><?xml version="1.0" encoding="utf-8"?>
-<p:sld xmlns:a="http://schemas.openxmlformats.org/drawingml/2006/main" xmlns:r="http://schemas.openxmlformats.org/officeDocument/2006/relationships" xmlns:p="http://schemas.openxmlformats.org/presentationml/2006/main">
-  <p:cSld name="Slide 8">
-    <p:bg>
-      <p:bgPr>
-        <a:solidFill>
-          <a:srgbClr val="F6F3EC"/>
-        </a:solidFill>
-        <a:effectLst/>
-      </p:bgPr>
-    </p:bg>
-    <p:spTree>
-      <p:nvGrpSpPr>
-        <p:cNvPr id="1" name=""/>
-        <p:cNvGrpSpPr/>
-        <p:nvPr/>
-      </p:nvGrpSpPr>
-      <p:grpSpPr>
-        <a:xfrm>
-          <a:off x="0" y="0"/>
-          <a:ext cx="0" cy="0"/>
-          <a:chOff x="0" y="0"/>
-          <a:chExt cx="0" cy="0"/>
-        </a:xfrm>
-      </p:grpSpPr>
-      <p:sp>
-        <p:nvSpPr>
-          <p:cNvPr id="2" name="Text 0"/>
-          <p:cNvSpPr/>
-          <p:nvPr/>
-        </p:nvSpPr>
-        <p:spPr>
-          <a:xfrm>
-            <a:off x="812800" y="812800"/>
-            <a:ext cx="10883392" cy="528320"/>
-          </a:xfrm>
-          <a:prstGeom prst="rect">
-            <a:avLst/>
-          </a:prstGeom>
-          <a:noFill/>
-          <a:ln/>
-        </p:spPr>
-        <p:txBody>
-          <a:bodyPr wrap="square" lIns="0" tIns="0" rIns="0" bIns="0" rtlCol="0" anchor="t">
-            <a:normAutofit/>
-          </a:bodyPr>
-          <a:lstStyle/>
-          <a:p>
-            <a:pPr marL="0" indent="0" algn="l">
-              <a:lnSpc>
-                <a:spcPts val="3960"/>
-              </a:lnSpc>
-              <a:buNone/>
-            </a:pPr>
-            <a:r>
-              <a:rPr lang="en-US" sz="3600" b="1" dirty="0">
-                <a:solidFill>
-                  <a:srgbClr val="16202E"/>
-                </a:solidFill>
-                <a:latin typeface="Rubik" pitchFamily="34" charset="0"/>
-                <a:ea typeface="Rubik" pitchFamily="34" charset="-122"/>
-                <a:cs typeface="Rubik" pitchFamily="34" charset="-120"/>
-              </a:rPr>
-              <a:t>Развитие проекта</a:t>
-            </a:r>
-            <a:endParaRPr lang="en-US" sz="3600" dirty="0"/>
-          </a:p>
-        </p:txBody>
-      </p:sp>
-      <p:sp>
-        <p:nvSpPr>
-          <p:cNvPr id="3" name="Shape 1"/>
-          <p:cNvSpPr/>
-          <p:nvPr/>
-        </p:nvSpPr>
-        <p:spPr>
-          <a:xfrm>
-            <a:off x="822325" y="1630046"/>
-            <a:ext cx="3144044" cy="2543810"/>
-          </a:xfrm>
-          <a:prstGeom prst="roundRect">
-            <a:avLst>
-              <a:gd name="adj" fmla="val 5617"/>
-            </a:avLst>
-          </a:prstGeom>
-          <a:solidFill>
-            <a:srgbClr val="FBE9CC"/>
-          </a:solidFill>
-          <a:ln w="19050">
-            <a:solidFill>
-              <a:srgbClr val="F0A53A"/>
-            </a:solidFill>
-            <a:prstDash val="solid"/>
-          </a:ln>
-        </p:spPr>
-      </p:sp>
-      <p:sp>
-        <p:nvSpPr>
-          <p:cNvPr id="4" name="Text 2"/>
-          <p:cNvSpPr/>
-          <p:nvPr/>
-        </p:nvSpPr>
-        <p:spPr>
-          <a:xfrm>
-            <a:off x="1082040" y="1889761"/>
-            <a:ext cx="2703352" cy="238760"/>
-          </a:xfrm>
-          <a:prstGeom prst="rect">
-            <a:avLst/>
-          </a:prstGeom>
-          <a:noFill/>
-          <a:ln/>
-        </p:spPr>
-        <p:txBody>
-          <a:bodyPr wrap="square" lIns="0" tIns="0" rIns="0" bIns="0" rtlCol="0" anchor="t">
-            <a:normAutofit/>
-          </a:bodyPr>
-          <a:lstStyle/>
-          <a:p>
-            <a:pPr marL="0" indent="0" algn="l">
-              <a:lnSpc>
-                <a:spcPts val="1680"/>
-              </a:lnSpc>
-              <a:buNone/>
-            </a:pPr>
-            <a:r>
-              <a:rPr lang="en-US" sz="1400" b="1" kern="0" spc="100" dirty="0">
-                <a:solidFill>
-                  <a:srgbClr val="B25A06"/>
-                </a:solidFill>
-                <a:latin typeface="Rubik"/>
-                <a:ea typeface="IBM Plex Sans" pitchFamily="34" charset="-122"/>
-                <a:cs typeface="IBM Plex Sans" pitchFamily="34" charset="-120"/>
-              </a:rPr>
-              <a:t>01 · ХАКАТОН</a:t>
-            </a:r>
-            <a:endParaRPr lang="en-US" sz="1400" dirty="0">
-              <a:latin typeface="Rubik"/>
-            </a:endParaRPr>
-          </a:p>
-        </p:txBody>
-      </p:sp>
-      <p:sp>
-        <p:nvSpPr>
-          <p:cNvPr id="5" name="Text 3"/>
-          <p:cNvSpPr/>
-          <p:nvPr/>
-        </p:nvSpPr>
-        <p:spPr>
-          <a:xfrm>
-            <a:off x="1082040" y="2192021"/>
-            <a:ext cx="2703352" cy="360680"/>
-          </a:xfrm>
-          <a:prstGeom prst="rect">
-            <a:avLst/>
-          </a:prstGeom>
-          <a:noFill/>
-          <a:ln/>
-        </p:spPr>
-        <p:txBody>
-          <a:bodyPr wrap="square" lIns="0" tIns="0" rIns="0" bIns="0" rtlCol="0" anchor="t">
-            <a:normAutofit/>
-          </a:bodyPr>
-          <a:lstStyle/>
-          <a:p>
-            <a:pPr marL="0" indent="0" algn="l">
-              <a:lnSpc>
-                <a:spcPts val="2640"/>
-              </a:lnSpc>
-              <a:buNone/>
-            </a:pPr>
-            <a:r>
-              <a:rPr lang="en-US" sz="2800" b="1" dirty="0">
-                <a:solidFill>
-                  <a:srgbClr val="16202E"/>
-                </a:solidFill>
-                <a:latin typeface="Rubik"/>
-                <a:ea typeface="IBM Plex Sans" pitchFamily="34" charset="-122"/>
-                <a:cs typeface="IBM Plex Sans" pitchFamily="34" charset="-120"/>
-              </a:rPr>
-              <a:t>MVP</a:t>
-            </a:r>
-            <a:endParaRPr lang="en-US" sz="2800" dirty="0">
-              <a:latin typeface="Rubik"/>
-            </a:endParaRPr>
-          </a:p>
-        </p:txBody>
-      </p:sp>
-      <p:sp>
-        <p:nvSpPr>
-          <p:cNvPr id="6" name="Text 4"/>
-          <p:cNvSpPr/>
-          <p:nvPr/>
-        </p:nvSpPr>
-        <p:spPr>
-          <a:xfrm>
-            <a:off x="1082040" y="2616200"/>
-            <a:ext cx="2703352" cy="1021080"/>
-          </a:xfrm>
-          <a:prstGeom prst="rect">
-            <a:avLst/>
-          </a:prstGeom>
-          <a:noFill/>
-          <a:ln/>
-        </p:spPr>
-        <p:txBody>
-          <a:bodyPr wrap="square" lIns="0" tIns="0" rIns="0" bIns="0" rtlCol="0" anchor="t">
-            <a:normAutofit/>
-          </a:bodyPr>
-          <a:lstStyle/>
-          <a:p>
-            <a:pPr marL="0" indent="0" algn="l">
-              <a:lnSpc>
-                <a:spcPts val="1960"/>
-              </a:lnSpc>
-              <a:buNone/>
-            </a:pPr>
-            <a:r>
-              <a:rPr lang="en-US" sz="1500" dirty="0">
-                <a:solidFill>
-                  <a:srgbClr val="4A5566"/>
-                </a:solidFill>
-                <a:latin typeface="Cambria" panose="02040503050406030204" pitchFamily="18" charset="0"/>
-                <a:ea typeface="Cambria" panose="02040503050406030204" pitchFamily="18" charset="0"/>
-                <a:cs typeface="IBM Plex Sans" pitchFamily="34" charset="-120"/>
-              </a:rPr>
-              <a:t>Веб-сервис на синтетических данных: лимит, проверка покупки, </a:t>
-            </a:r>
-            <a:r>
-              <a:rPr lang="en-US" sz="1500" dirty="0" err="1">
-                <a:solidFill>
-                  <a:srgbClr val="4A5566"/>
-                </a:solidFill>
-                <a:latin typeface="Cambria" panose="02040503050406030204" pitchFamily="18" charset="0"/>
-                <a:ea typeface="Cambria" panose="02040503050406030204" pitchFamily="18" charset="0"/>
-                <a:cs typeface="IBM Plex Sans" pitchFamily="34" charset="-120"/>
-              </a:rPr>
-              <a:t>чат</a:t>
-            </a:r>
-            <a:r>
-              <a:rPr lang="en-US" sz="1500" dirty="0">
-                <a:solidFill>
-                  <a:srgbClr val="4A5566"/>
-                </a:solidFill>
-                <a:latin typeface="Cambria" panose="02040503050406030204" pitchFamily="18" charset="0"/>
-                <a:ea typeface="Cambria" panose="02040503050406030204" pitchFamily="18" charset="0"/>
-                <a:cs typeface="IBM Plex Sans" pitchFamily="34" charset="-120"/>
-              </a:rPr>
-              <a:t> </a:t>
-            </a:r>
-            <a:r>
-              <a:rPr lang="en-US" sz="1500" dirty="0" err="1">
-                <a:solidFill>
-                  <a:srgbClr val="4A5566"/>
-                </a:solidFill>
-                <a:latin typeface="Cambria" panose="02040503050406030204" pitchFamily="18" charset="0"/>
-                <a:ea typeface="Cambria" panose="02040503050406030204" pitchFamily="18" charset="0"/>
-                <a:cs typeface="IBM Plex Sans" pitchFamily="34" charset="-120"/>
-              </a:rPr>
-              <a:t>на</a:t>
-            </a:r>
-            <a:r>
-              <a:rPr lang="en-US" sz="1500" dirty="0">
-                <a:solidFill>
-                  <a:srgbClr val="4A5566"/>
-                </a:solidFill>
-                <a:latin typeface="Cambria" panose="02040503050406030204" pitchFamily="18" charset="0"/>
-                <a:ea typeface="Cambria" panose="02040503050406030204" pitchFamily="18" charset="0"/>
-                <a:cs typeface="IBM Plex Sans" pitchFamily="34" charset="-120"/>
-              </a:rPr>
-              <a:t> LLM, проверочные примеры</a:t>
-            </a:r>
-            <a:endParaRPr lang="en-US" sz="1500" dirty="0">
-              <a:latin typeface="Cambria" panose="02040503050406030204" pitchFamily="18" charset="0"/>
-              <a:ea typeface="Cambria" panose="02040503050406030204" pitchFamily="18" charset="0"/>
-            </a:endParaRPr>
-          </a:p>
-        </p:txBody>
-      </p:sp>
-      <p:sp>
-        <p:nvSpPr>
-          <p:cNvPr id="7" name="Text 5"/>
-          <p:cNvSpPr/>
-          <p:nvPr/>
-        </p:nvSpPr>
-        <p:spPr>
-          <a:xfrm>
-            <a:off x="1082040" y="3756659"/>
-            <a:ext cx="2703352" cy="238760"/>
-          </a:xfrm>
-          <a:prstGeom prst="rect">
-            <a:avLst/>
-          </a:prstGeom>
-          <a:noFill/>
-          <a:ln/>
-        </p:spPr>
-        <p:txBody>
-          <a:bodyPr wrap="square" lIns="0" tIns="0" rIns="0" bIns="0" rtlCol="0" anchor="t">
-            <a:normAutofit/>
-          </a:bodyPr>
-          <a:lstStyle/>
-          <a:p>
-            <a:pPr marL="0" indent="0" algn="l">
-              <a:lnSpc>
-                <a:spcPts val="1680"/>
-              </a:lnSpc>
-              <a:buNone/>
-            </a:pPr>
-            <a:r>
-              <a:rPr lang="en-US" sz="1400" b="1" dirty="0">
-                <a:solidFill>
-                  <a:srgbClr val="16202E"/>
-                </a:solidFill>
-                <a:latin typeface="Cambria" panose="02040503050406030204" pitchFamily="18" charset="0"/>
-                <a:ea typeface="Cambria" panose="02040503050406030204" pitchFamily="18" charset="0"/>
-                <a:cs typeface="IBM Plex Sans" pitchFamily="34" charset="-120"/>
-              </a:rPr>
-              <a:t>Готово к защите</a:t>
-            </a:r>
-            <a:endParaRPr lang="en-US" sz="1400" dirty="0">
-              <a:latin typeface="Cambria" panose="02040503050406030204" pitchFamily="18" charset="0"/>
-              <a:ea typeface="Cambria" panose="02040503050406030204" pitchFamily="18" charset="0"/>
-            </a:endParaRPr>
-          </a:p>
-        </p:txBody>
-      </p:sp>
-      <p:pic>
-        <p:nvPicPr>
-          <p:cNvPr id="8" name="Image 0" descr="arrow-right"/>
-          <p:cNvPicPr>
-            <a:picLocks noChangeAspect="1"/>
-          </p:cNvPicPr>
-          <p:nvPr/>
-        </p:nvPicPr>
-        <p:blipFill>
-          <a:blip r:embed="rId3"/>
-          <a:srcRect/>
-          <a:stretch/>
-        </p:blipFill>
-        <p:spPr>
-          <a:xfrm>
-            <a:off x="4077494" y="2800350"/>
-            <a:ext cx="355600" cy="203200"/>
-          </a:xfrm>
-          <a:prstGeom prst="rect">
-            <a:avLst/>
-          </a:prstGeom>
-        </p:spPr>
-      </p:pic>
-      <p:sp>
-        <p:nvSpPr>
-          <p:cNvPr id="9" name="Shape 6"/>
-          <p:cNvSpPr/>
-          <p:nvPr/>
-        </p:nvSpPr>
-        <p:spPr>
-          <a:xfrm>
-            <a:off x="4537869" y="1623696"/>
-            <a:ext cx="3136503" cy="2556510"/>
-          </a:xfrm>
-          <a:prstGeom prst="roundRect">
-            <a:avLst>
-              <a:gd name="adj" fmla="val 5837"/>
-            </a:avLst>
-          </a:prstGeom>
-          <a:solidFill>
-            <a:srgbClr val="FDFBF6"/>
-          </a:solidFill>
-          <a:ln w="6350">
-            <a:solidFill>
-              <a:srgbClr val="E2DCCF"/>
-            </a:solidFill>
-            <a:prstDash val="solid"/>
-          </a:ln>
-        </p:spPr>
-      </p:sp>
-      <p:sp>
-        <p:nvSpPr>
-          <p:cNvPr id="10" name="Text 7"/>
-          <p:cNvSpPr/>
-          <p:nvPr/>
-        </p:nvSpPr>
-        <p:spPr>
-          <a:xfrm>
-            <a:off x="4793774" y="1879600"/>
-            <a:ext cx="2703434" cy="238760"/>
-          </a:xfrm>
-          <a:prstGeom prst="rect">
-            <a:avLst/>
-          </a:prstGeom>
-          <a:noFill/>
-          <a:ln/>
-        </p:spPr>
-        <p:txBody>
-          <a:bodyPr wrap="square" lIns="0" tIns="0" rIns="0" bIns="0" rtlCol="0" anchor="t">
-            <a:normAutofit/>
-          </a:bodyPr>
-          <a:lstStyle/>
-          <a:p>
-            <a:pPr marL="0" indent="0" algn="l">
-              <a:lnSpc>
-                <a:spcPts val="1680"/>
-              </a:lnSpc>
-              <a:buNone/>
-            </a:pPr>
-            <a:r>
-              <a:rPr lang="en-US" sz="1400" b="1" kern="0" spc="100" dirty="0">
-                <a:solidFill>
-                  <a:srgbClr val="B25A06"/>
-                </a:solidFill>
-                <a:latin typeface="Rubik"/>
-                <a:ea typeface="IBM Plex Sans" pitchFamily="34" charset="-122"/>
-                <a:cs typeface="IBM Plex Sans" pitchFamily="34" charset="-120"/>
-              </a:rPr>
-              <a:t>02 · БЛИЖАЙШИЙ ЭТАП</a:t>
-            </a:r>
-            <a:endParaRPr lang="en-US" sz="1400" dirty="0">
-              <a:latin typeface="Rubik"/>
-            </a:endParaRPr>
-          </a:p>
-        </p:txBody>
-      </p:sp>
-      <p:sp>
-        <p:nvSpPr>
-          <p:cNvPr id="11" name="Text 8"/>
-          <p:cNvSpPr/>
-          <p:nvPr/>
-        </p:nvSpPr>
-        <p:spPr>
-          <a:xfrm>
-            <a:off x="4793774" y="2181861"/>
-            <a:ext cx="2703434" cy="360680"/>
-          </a:xfrm>
-          <a:prstGeom prst="rect">
-            <a:avLst/>
-          </a:prstGeom>
-          <a:noFill/>
-          <a:ln/>
-        </p:spPr>
-        <p:txBody>
-          <a:bodyPr wrap="square" lIns="0" tIns="0" rIns="0" bIns="0" rtlCol="0" anchor="t">
-            <a:normAutofit/>
-          </a:bodyPr>
-          <a:lstStyle/>
-          <a:p>
-            <a:pPr marL="0" indent="0" algn="l">
-              <a:lnSpc>
-                <a:spcPts val="2640"/>
-              </a:lnSpc>
-              <a:buNone/>
-            </a:pPr>
-            <a:r>
-              <a:rPr lang="en-US" sz="2800" b="1" dirty="0">
-                <a:solidFill>
-                  <a:srgbClr val="16202E"/>
-                </a:solidFill>
-                <a:latin typeface="Rubik"/>
-                <a:ea typeface="IBM Plex Sans" pitchFamily="34" charset="-122"/>
-                <a:cs typeface="IBM Plex Sans" pitchFamily="34" charset="-120"/>
-              </a:rPr>
-              <a:t>Проверка</a:t>
-            </a:r>
-            <a:endParaRPr lang="en-US" sz="2800" dirty="0">
-              <a:latin typeface="Rubik"/>
-            </a:endParaRPr>
-          </a:p>
-        </p:txBody>
-      </p:sp>
-      <p:sp>
-        <p:nvSpPr>
-          <p:cNvPr id="12" name="Text 9"/>
-          <p:cNvSpPr/>
-          <p:nvPr/>
-        </p:nvSpPr>
-        <p:spPr>
-          <a:xfrm>
-            <a:off x="4793774" y="2606039"/>
-            <a:ext cx="2703434" cy="1270000"/>
-          </a:xfrm>
-          <a:prstGeom prst="rect">
-            <a:avLst/>
-          </a:prstGeom>
-          <a:noFill/>
-          <a:ln/>
-        </p:spPr>
-        <p:txBody>
-          <a:bodyPr wrap="square" lIns="0" tIns="0" rIns="0" bIns="0" rtlCol="0" anchor="t">
-            <a:normAutofit/>
-          </a:bodyPr>
-          <a:lstStyle/>
-          <a:p>
-            <a:pPr marL="0" indent="0" algn="l">
-              <a:lnSpc>
-                <a:spcPts val="1960"/>
-              </a:lnSpc>
-              <a:buNone/>
-            </a:pPr>
-            <a:r>
-              <a:rPr lang="en-US" sz="1500" dirty="0">
-                <a:solidFill>
-                  <a:srgbClr val="4A5566"/>
-                </a:solidFill>
-                <a:latin typeface="Cambria" panose="02040503050406030204" pitchFamily="18" charset="0"/>
-                <a:ea typeface="Cambria" panose="02040503050406030204" pitchFamily="18" charset="0"/>
-                <a:cs typeface="IBM Plex Sans" pitchFamily="34" charset="-120"/>
-              </a:rPr>
-              <a:t>Тест с 10 студентами: цель — не меньше 70% оценок 4–5 из 5. Точность расчёта на реальных выписках. Поиск подписок и цели накопления</a:t>
-            </a:r>
-            <a:endParaRPr lang="en-US" sz="1500" dirty="0">
-              <a:latin typeface="Cambria" panose="02040503050406030204" pitchFamily="18" charset="0"/>
-              <a:ea typeface="Cambria" panose="02040503050406030204" pitchFamily="18" charset="0"/>
-            </a:endParaRPr>
-          </a:p>
-        </p:txBody>
-      </p:sp>
-      <p:pic>
-        <p:nvPicPr>
-          <p:cNvPr id="13" name="Image 1" descr="arrow-right"/>
-          <p:cNvPicPr>
-            <a:picLocks noChangeAspect="1"/>
-          </p:cNvPicPr>
-          <p:nvPr/>
-        </p:nvPicPr>
-        <p:blipFill>
-          <a:blip r:embed="rId3"/>
-          <a:srcRect/>
-          <a:stretch/>
-        </p:blipFill>
-        <p:spPr>
-          <a:xfrm>
-            <a:off x="7779147" y="2800350"/>
-            <a:ext cx="355600" cy="203200"/>
-          </a:xfrm>
-          <a:prstGeom prst="rect">
-            <a:avLst/>
-          </a:prstGeom>
-        </p:spPr>
-      </p:pic>
-      <p:sp>
-        <p:nvSpPr>
-          <p:cNvPr id="14" name="Shape 10"/>
-          <p:cNvSpPr/>
-          <p:nvPr/>
-        </p:nvSpPr>
-        <p:spPr>
-          <a:xfrm>
-            <a:off x="8239522" y="1623696"/>
-            <a:ext cx="3136503" cy="2556510"/>
-          </a:xfrm>
-          <a:prstGeom prst="roundRect">
-            <a:avLst>
-              <a:gd name="adj" fmla="val 5837"/>
-            </a:avLst>
-          </a:prstGeom>
-          <a:solidFill>
-            <a:srgbClr val="FDFBF6"/>
-          </a:solidFill>
-          <a:ln w="6350">
-            <a:solidFill>
-              <a:srgbClr val="E2DCCF"/>
-            </a:solidFill>
-            <a:prstDash val="solid"/>
-          </a:ln>
-        </p:spPr>
-      </p:sp>
-      <p:sp>
-        <p:nvSpPr>
-          <p:cNvPr id="15" name="Text 11"/>
-          <p:cNvSpPr/>
-          <p:nvPr/>
-        </p:nvSpPr>
-        <p:spPr>
-          <a:xfrm>
-            <a:off x="8495427" y="1879600"/>
-            <a:ext cx="2703434" cy="238760"/>
-          </a:xfrm>
-          <a:prstGeom prst="rect">
-            <a:avLst/>
-          </a:prstGeom>
-          <a:noFill/>
-          <a:ln/>
-        </p:spPr>
-        <p:txBody>
-          <a:bodyPr wrap="square" lIns="0" tIns="0" rIns="0" bIns="0" rtlCol="0" anchor="t">
-            <a:normAutofit/>
-          </a:bodyPr>
-          <a:lstStyle/>
-          <a:p>
-            <a:pPr marL="0" indent="0" algn="l">
-              <a:lnSpc>
-                <a:spcPts val="1680"/>
-              </a:lnSpc>
-              <a:buNone/>
-            </a:pPr>
-            <a:r>
-              <a:rPr lang="en-US" sz="1400" b="1" kern="0" spc="100" dirty="0">
-                <a:solidFill>
-                  <a:srgbClr val="B25A06"/>
-                </a:solidFill>
-                <a:latin typeface="Rubik"/>
-                <a:ea typeface="IBM Plex Sans" pitchFamily="34" charset="-122"/>
-                <a:cs typeface="IBM Plex Sans" pitchFamily="34" charset="-120"/>
-              </a:rPr>
-              <a:t>03 · ДАЛЬШЕ</a:t>
-            </a:r>
-            <a:endParaRPr lang="en-US" sz="1400" dirty="0">
-              <a:latin typeface="Rubik"/>
-            </a:endParaRPr>
-          </a:p>
-        </p:txBody>
-      </p:sp>
-      <p:sp>
-        <p:nvSpPr>
-          <p:cNvPr id="16" name="Text 12"/>
-          <p:cNvSpPr/>
-          <p:nvPr/>
-        </p:nvSpPr>
-        <p:spPr>
-          <a:xfrm>
-            <a:off x="8495427" y="2181861"/>
-            <a:ext cx="2703434" cy="360680"/>
-          </a:xfrm>
-          <a:prstGeom prst="rect">
-            <a:avLst/>
-          </a:prstGeom>
-          <a:noFill/>
-          <a:ln/>
-        </p:spPr>
-        <p:txBody>
-          <a:bodyPr wrap="square" lIns="0" tIns="0" rIns="0" bIns="0" rtlCol="0" anchor="t">
-            <a:normAutofit/>
-          </a:bodyPr>
-          <a:lstStyle/>
-          <a:p>
-            <a:pPr marL="0" indent="0" algn="l">
-              <a:lnSpc>
-                <a:spcPts val="2640"/>
-              </a:lnSpc>
-              <a:buNone/>
-            </a:pPr>
-            <a:r>
-              <a:rPr lang="en-US" sz="2800" b="1" dirty="0">
-                <a:solidFill>
-                  <a:srgbClr val="16202E"/>
-                </a:solidFill>
-                <a:latin typeface="Rubik"/>
-                <a:ea typeface="IBM Plex Sans" pitchFamily="34" charset="-122"/>
-                <a:cs typeface="IBM Plex Sans" pitchFamily="34" charset="-120"/>
-              </a:rPr>
-              <a:t>Масштаб</a:t>
-            </a:r>
-            <a:endParaRPr lang="en-US" sz="2800" dirty="0">
-              <a:latin typeface="Rubik"/>
-            </a:endParaRPr>
-          </a:p>
-        </p:txBody>
-      </p:sp>
-      <p:sp>
-        <p:nvSpPr>
-          <p:cNvPr id="17" name="Text 13"/>
-          <p:cNvSpPr/>
-          <p:nvPr/>
-        </p:nvSpPr>
-        <p:spPr>
-          <a:xfrm>
-            <a:off x="8495427" y="2606039"/>
-            <a:ext cx="2703434" cy="1270000"/>
-          </a:xfrm>
-          <a:prstGeom prst="rect">
-            <a:avLst/>
-          </a:prstGeom>
-          <a:noFill/>
-          <a:ln/>
-        </p:spPr>
-        <p:txBody>
-          <a:bodyPr wrap="square" lIns="0" tIns="0" rIns="0" bIns="0" rtlCol="0" anchor="t">
-            <a:normAutofit/>
-          </a:bodyPr>
-          <a:lstStyle/>
-          <a:p>
-            <a:pPr marL="0" indent="0" algn="l">
-              <a:lnSpc>
-                <a:spcPts val="1960"/>
-              </a:lnSpc>
-              <a:buNone/>
-            </a:pPr>
-            <a:r>
-              <a:rPr lang="en-US" sz="1500" dirty="0">
-                <a:solidFill>
-                  <a:srgbClr val="4A5566"/>
-                </a:solidFill>
-                <a:latin typeface="Cambria" panose="02040503050406030204" pitchFamily="18" charset="0"/>
-                <a:ea typeface="Cambria" panose="02040503050406030204" pitchFamily="18" charset="0"/>
-                <a:cs typeface="IBM Plex Sans" pitchFamily="34" charset="-120"/>
-              </a:rPr>
-              <a:t>Модуль в приложении Т-Банка на реальных транзакциях с согласия клиента. B2B2C для других банков. Молодые специалисты</a:t>
-            </a:r>
-            <a:endParaRPr lang="en-US" sz="1500" dirty="0">
-              <a:latin typeface="Cambria" panose="02040503050406030204" pitchFamily="18" charset="0"/>
-              <a:ea typeface="Cambria" panose="02040503050406030204" pitchFamily="18" charset="0"/>
-            </a:endParaRPr>
-          </a:p>
-        </p:txBody>
-      </p:sp>
-      <p:sp>
-        <p:nvSpPr>
-          <p:cNvPr id="18" name="Text 14"/>
-          <p:cNvSpPr/>
-          <p:nvPr/>
-        </p:nvSpPr>
-        <p:spPr>
-          <a:xfrm>
-            <a:off x="812800" y="4488179"/>
-            <a:ext cx="10883392" cy="594360"/>
-          </a:xfrm>
-          <a:prstGeom prst="rect">
-            <a:avLst/>
-          </a:prstGeom>
-          <a:noFill/>
-          <a:ln/>
-        </p:spPr>
-        <p:txBody>
-          <a:bodyPr wrap="square" lIns="0" tIns="0" rIns="0" bIns="0" rtlCol="0" anchor="t">
-            <a:normAutofit/>
-          </a:bodyPr>
-          <a:lstStyle/>
-          <a:p>
-            <a:pPr marL="0" indent="0" algn="l">
-              <a:lnSpc>
-                <a:spcPts val="2240"/>
-              </a:lnSpc>
-              <a:buNone/>
-            </a:pPr>
-            <a:r>
-              <a:rPr lang="en-US" sz="1600" dirty="0">
-                <a:solidFill>
-                  <a:srgbClr val="16202E"/>
-                </a:solidFill>
-                <a:latin typeface="Cambria" panose="02040503050406030204" pitchFamily="18" charset="0"/>
-                <a:ea typeface="Cambria" panose="02040503050406030204" pitchFamily="18" charset="0"/>
-                <a:cs typeface="IBM Plex Sans" pitchFamily="34" charset="-120"/>
-              </a:rPr>
-              <a:t>Главная гипотеза пилота: студенты открывают лимит каждый день — это и есть удержание клиента для банка.</a:t>
-            </a:r>
-            <a:endParaRPr lang="en-US" sz="1600" dirty="0">
-              <a:latin typeface="Cambria" panose="02040503050406030204" pitchFamily="18" charset="0"/>
-              <a:ea typeface="Cambria" panose="02040503050406030204" pitchFamily="18" charset="0"/>
-            </a:endParaRPr>
-          </a:p>
-        </p:txBody>
-      </p:sp>
-    </p:spTree>
-  </p:cSld>
-  <p:clrMapOvr>
-    <a:masterClrMapping/>
-  </p:clrMapOvr>
-</p:sld>
-</file>
-
-<file path=ppt/slides/slide9.xml><?xml version="1.0" encoding="utf-8"?>
-<p:sld xmlns:a="http://schemas.openxmlformats.org/drawingml/2006/main" xmlns:r="http://schemas.openxmlformats.org/officeDocument/2006/relationships" xmlns:p="http://schemas.openxmlformats.org/presentationml/2006/main">
-  <p:cSld name="Slide 9">
-    <p:bg>
-      <p:bgPr>
-        <a:solidFill>
-          <a:srgbClr val="F6F3EC"/>
-        </a:solidFill>
-        <a:effectLst/>
-      </p:bgPr>
-    </p:bg>
-    <p:spTree>
-      <p:nvGrpSpPr>
-        <p:cNvPr id="1" name=""/>
-        <p:cNvGrpSpPr/>
-        <p:nvPr/>
-      </p:nvGrpSpPr>
-      <p:grpSpPr>
-        <a:xfrm>
-          <a:off x="0" y="0"/>
-          <a:ext cx="0" cy="0"/>
-          <a:chOff x="0" y="0"/>
-          <a:chExt cx="0" cy="0"/>
-        </a:xfrm>
-      </p:grpSpPr>
-      <p:sp>
-        <p:nvSpPr>
-          <p:cNvPr id="2" name="Text 0"/>
-          <p:cNvSpPr/>
-          <p:nvPr/>
-        </p:nvSpPr>
-        <p:spPr>
-          <a:xfrm>
-            <a:off x="812800" y="812800"/>
-            <a:ext cx="10883392" cy="528320"/>
-          </a:xfrm>
-          <a:prstGeom prst="rect">
-            <a:avLst/>
-          </a:prstGeom>
-          <a:noFill/>
-          <a:ln/>
-        </p:spPr>
-        <p:txBody>
-          <a:bodyPr wrap="square" lIns="0" tIns="0" rIns="0" bIns="0" rtlCol="0" anchor="t">
-            <a:normAutofit/>
-          </a:bodyPr>
-          <a:lstStyle/>
-          <a:p>
-            <a:pPr marL="0" indent="0" algn="l">
-              <a:lnSpc>
-                <a:spcPts val="3960"/>
-              </a:lnSpc>
-              <a:buNone/>
-            </a:pPr>
-            <a:r>
-              <a:rPr lang="en-US" sz="3600" b="1" dirty="0">
-                <a:solidFill>
-                  <a:srgbClr val="16202E"/>
-                </a:solidFill>
-                <a:latin typeface="Times New Roman" panose="02020603050405020304" pitchFamily="18" charset="0"/>
-                <a:ea typeface="Rubik" pitchFamily="34" charset="-122"/>
-                <a:cs typeface="Times New Roman" panose="02020603050405020304" pitchFamily="18" charset="0"/>
-              </a:rPr>
-              <a:t>Итог</a:t>
-            </a:r>
-            <a:endParaRPr lang="en-US" sz="3600" dirty="0">
-              <a:latin typeface="Times New Roman" panose="02020603050405020304" pitchFamily="18" charset="0"/>
-              <a:cs typeface="Times New Roman" panose="02020603050405020304" pitchFamily="18" charset="0"/>
-            </a:endParaRPr>
-          </a:p>
-        </p:txBody>
-      </p:sp>
-      <p:sp>
-        <p:nvSpPr>
-          <p:cNvPr id="3" name="Text 1"/>
-          <p:cNvSpPr/>
-          <p:nvPr/>
-        </p:nvSpPr>
-        <p:spPr>
-          <a:xfrm>
-            <a:off x="812800" y="1620520"/>
-            <a:ext cx="5839247" cy="2258906"/>
-          </a:xfrm>
-          <a:prstGeom prst="rect">
-            <a:avLst/>
-          </a:prstGeom>
-          <a:noFill/>
-          <a:ln/>
-        </p:spPr>
-        <p:txBody>
-          <a:bodyPr wrap="square" lIns="0" tIns="0" rIns="0" bIns="0" rtlCol="0" anchor="t">
-            <a:normAutofit/>
-          </a:bodyPr>
-          <a:lstStyle/>
-          <a:p>
-            <a:pPr marL="0" indent="0" algn="l">
-              <a:lnSpc>
-                <a:spcPts val="2240"/>
-              </a:lnSpc>
-              <a:buNone/>
-            </a:pPr>
-            <a:r>
-              <a:rPr lang="en-US" sz="1700" b="1" dirty="0">
-                <a:solidFill>
-                  <a:srgbClr val="B25A06"/>
-                </a:solidFill>
-                <a:latin typeface="Cambria" panose="02040503050406030204" pitchFamily="18" charset="0"/>
-                <a:ea typeface="Cambria" panose="02040503050406030204" pitchFamily="18" charset="0"/>
-                <a:cs typeface="IBM Plex Sans" pitchFamily="34" charset="-120"/>
-              </a:rPr>
-              <a:t>Проблема.</a:t>
-            </a:r>
-            <a:r>
-              <a:rPr lang="en-US" sz="1700" dirty="0">
-                <a:solidFill>
-                  <a:srgbClr val="16202E"/>
-                </a:solidFill>
-                <a:latin typeface="Cambria" panose="02040503050406030204" pitchFamily="18" charset="0"/>
-                <a:ea typeface="Cambria" panose="02040503050406030204" pitchFamily="18" charset="0"/>
-                <a:cs typeface="IBM Plex Sans" pitchFamily="34" charset="-120"/>
-              </a:rPr>
-              <a:t> 1,6 млн студентов с нерегулярным доходом не знают, сколько можно тратить до следующего поступления.</a:t>
-            </a:r>
-            <a:endParaRPr lang="en-US" sz="1700" dirty="0">
-              <a:latin typeface="Cambria" panose="02040503050406030204" pitchFamily="18" charset="0"/>
-              <a:ea typeface="Cambria" panose="02040503050406030204" pitchFamily="18" charset="0"/>
-            </a:endParaRPr>
-          </a:p>
-        </p:txBody>
-      </p:sp>
-      <p:sp>
-        <p:nvSpPr>
-          <p:cNvPr id="4" name="Text 2"/>
-          <p:cNvSpPr/>
-          <p:nvPr/>
-        </p:nvSpPr>
-        <p:spPr>
-          <a:xfrm>
-            <a:off x="812800" y="2520266"/>
-            <a:ext cx="5839247" cy="2258906"/>
-          </a:xfrm>
-          <a:prstGeom prst="rect">
-            <a:avLst/>
-          </a:prstGeom>
-          <a:noFill/>
-          <a:ln/>
-        </p:spPr>
-        <p:txBody>
-          <a:bodyPr wrap="square" lIns="0" tIns="0" rIns="0" bIns="0" rtlCol="0" anchor="t">
-            <a:normAutofit/>
-          </a:bodyPr>
-          <a:lstStyle/>
-          <a:p>
-            <a:pPr marL="0" indent="0" algn="l">
-              <a:lnSpc>
-                <a:spcPts val="2240"/>
-              </a:lnSpc>
-              <a:buNone/>
-            </a:pPr>
-            <a:r>
-              <a:rPr lang="en-US" sz="1700" b="1" dirty="0">
-                <a:solidFill>
-                  <a:srgbClr val="B25A06"/>
-                </a:solidFill>
-                <a:latin typeface="Cambria" panose="02040503050406030204" pitchFamily="18" charset="0"/>
-                <a:ea typeface="Cambria" panose="02040503050406030204" pitchFamily="18" charset="0"/>
-                <a:cs typeface="IBM Plex Sans" pitchFamily="34" charset="-120"/>
-              </a:rPr>
-              <a:t>Решение.</a:t>
-            </a:r>
-            <a:r>
-              <a:rPr lang="en-US" sz="1700" dirty="0">
-                <a:solidFill>
-                  <a:srgbClr val="16202E"/>
-                </a:solidFill>
-                <a:latin typeface="Cambria" panose="02040503050406030204" pitchFamily="18" charset="0"/>
-                <a:ea typeface="Cambria" panose="02040503050406030204" pitchFamily="18" charset="0"/>
-                <a:cs typeface="IBM Plex Sans" pitchFamily="34" charset="-120"/>
-              </a:rPr>
-              <a:t> Одна цифра на сегодня: GigaChat понимает вопрос, код считает, ответ объясняет допущения.</a:t>
-            </a:r>
-            <a:endParaRPr lang="en-US" sz="1700" dirty="0">
-              <a:latin typeface="Cambria" panose="02040503050406030204" pitchFamily="18" charset="0"/>
-              <a:ea typeface="Cambria" panose="02040503050406030204" pitchFamily="18" charset="0"/>
-            </a:endParaRPr>
-          </a:p>
-        </p:txBody>
-      </p:sp>
-      <p:sp>
-        <p:nvSpPr>
-          <p:cNvPr id="5" name="Text 3"/>
-          <p:cNvSpPr/>
-          <p:nvPr/>
-        </p:nvSpPr>
-        <p:spPr>
-          <a:xfrm>
-            <a:off x="812800" y="3254329"/>
-            <a:ext cx="5839247" cy="2258906"/>
-          </a:xfrm>
-          <a:prstGeom prst="rect">
-            <a:avLst/>
-          </a:prstGeom>
-          <a:noFill/>
-          <a:ln/>
-        </p:spPr>
-        <p:txBody>
-          <a:bodyPr wrap="square" lIns="0" tIns="0" rIns="0" bIns="0" rtlCol="0" anchor="t">
-            <a:normAutofit/>
-          </a:bodyPr>
-          <a:lstStyle/>
-          <a:p>
-            <a:pPr marL="0" indent="0" algn="l">
-              <a:lnSpc>
-                <a:spcPts val="2240"/>
-              </a:lnSpc>
-              <a:buNone/>
-            </a:pPr>
-            <a:r>
-              <a:rPr lang="en-US" sz="1700" b="1" dirty="0">
-                <a:solidFill>
-                  <a:srgbClr val="B25A06"/>
-                </a:solidFill>
-                <a:latin typeface="Cambria" panose="02040503050406030204" pitchFamily="18" charset="0"/>
-                <a:ea typeface="Cambria" panose="02040503050406030204" pitchFamily="18" charset="0"/>
-                <a:cs typeface="IBM Plex Sans" pitchFamily="34" charset="-120"/>
-              </a:rPr>
-              <a:t>Ценность для студента.</a:t>
-            </a:r>
-            <a:r>
-              <a:rPr lang="en-US" sz="1700" dirty="0">
-                <a:solidFill>
-                  <a:srgbClr val="16202E"/>
-                </a:solidFill>
-                <a:latin typeface="Cambria" panose="02040503050406030204" pitchFamily="18" charset="0"/>
-                <a:ea typeface="Cambria" panose="02040503050406030204" pitchFamily="18" charset="0"/>
-                <a:cs typeface="IBM Plex Sans" pitchFamily="34" charset="-120"/>
-              </a:rPr>
-              <a:t> Нехватка денег видна заранее, а не в последний день,  есть время решить, что урезать.</a:t>
-            </a:r>
-            <a:endParaRPr lang="en-US" sz="1700" dirty="0">
-              <a:latin typeface="Cambria" panose="02040503050406030204" pitchFamily="18" charset="0"/>
-              <a:ea typeface="Cambria" panose="02040503050406030204" pitchFamily="18" charset="0"/>
-            </a:endParaRPr>
-          </a:p>
-        </p:txBody>
-      </p:sp>
-      <p:sp>
-        <p:nvSpPr>
-          <p:cNvPr id="6" name="Text 4"/>
-          <p:cNvSpPr/>
-          <p:nvPr/>
-        </p:nvSpPr>
-        <p:spPr>
-          <a:xfrm>
-            <a:off x="838200" y="3988387"/>
-            <a:ext cx="5621867" cy="1927537"/>
-          </a:xfrm>
-          <a:prstGeom prst="rect">
-            <a:avLst/>
-          </a:prstGeom>
-          <a:noFill/>
-          <a:ln/>
-        </p:spPr>
-        <p:txBody>
-          <a:bodyPr wrap="square" lIns="0" tIns="0" rIns="0" bIns="0" rtlCol="0" anchor="t">
-            <a:normAutofit/>
-          </a:bodyPr>
-          <a:lstStyle/>
-          <a:p>
-            <a:pPr marL="0" indent="0" algn="l">
-              <a:lnSpc>
-                <a:spcPts val="2240"/>
-              </a:lnSpc>
-              <a:buNone/>
-            </a:pPr>
-            <a:r>
-              <a:rPr lang="en-US" sz="1700" b="1" dirty="0">
-                <a:solidFill>
-                  <a:srgbClr val="B25A06"/>
-                </a:solidFill>
-                <a:latin typeface="Cambria" panose="02040503050406030204" pitchFamily="18" charset="0"/>
-                <a:ea typeface="Cambria" panose="02040503050406030204" pitchFamily="18" charset="0"/>
-                <a:cs typeface="IBM Plex Sans" pitchFamily="34" charset="-120"/>
-              </a:rPr>
-              <a:t>Для Т-Банка.</a:t>
-            </a:r>
-            <a:r>
-              <a:rPr lang="en-US" sz="1700" dirty="0">
-                <a:solidFill>
-                  <a:srgbClr val="16202E"/>
-                </a:solidFill>
-                <a:latin typeface="Cambria" panose="02040503050406030204" pitchFamily="18" charset="0"/>
-                <a:ea typeface="Cambria" panose="02040503050406030204" pitchFamily="18" charset="0"/>
-                <a:cs typeface="IBM Plex Sans" pitchFamily="34" charset="-120"/>
-              </a:rPr>
-              <a:t> Лояльные молодые клиенты и +3,7 млн ₽ в базовом сценарии пилота.</a:t>
-            </a:r>
-            <a:endParaRPr lang="en-US" sz="1700" dirty="0">
-              <a:latin typeface="Cambria" panose="02040503050406030204" pitchFamily="18" charset="0"/>
-              <a:ea typeface="Cambria" panose="02040503050406030204" pitchFamily="18" charset="0"/>
-            </a:endParaRPr>
-          </a:p>
-        </p:txBody>
-      </p:sp>
-      <p:sp>
-        <p:nvSpPr>
-          <p:cNvPr id="7" name="Text 5"/>
-          <p:cNvSpPr/>
-          <p:nvPr/>
-        </p:nvSpPr>
-        <p:spPr>
-          <a:xfrm>
-            <a:off x="812800" y="4665730"/>
-            <a:ext cx="5545667" cy="1159337"/>
-          </a:xfrm>
-          <a:prstGeom prst="rect">
-            <a:avLst/>
-          </a:prstGeom>
-          <a:noFill/>
-          <a:ln/>
-        </p:spPr>
-        <p:txBody>
-          <a:bodyPr wrap="square" lIns="0" tIns="0" rIns="0" bIns="0" rtlCol="0" anchor="t">
-            <a:normAutofit/>
-          </a:bodyPr>
-          <a:lstStyle/>
-          <a:p>
-            <a:pPr marL="0" indent="0" algn="l">
-              <a:lnSpc>
-                <a:spcPts val="1820"/>
-              </a:lnSpc>
-              <a:buNone/>
-            </a:pPr>
-            <a:r>
-              <a:rPr lang="en-US" sz="1600" dirty="0">
-                <a:solidFill>
-                  <a:srgbClr val="4A5566"/>
-                </a:solidFill>
-                <a:latin typeface="Cambria" panose="02040503050406030204" pitchFamily="18" charset="0"/>
-                <a:ea typeface="Cambria" panose="02040503050406030204" pitchFamily="18" charset="0"/>
-                <a:cs typeface="IBM Plex Sans" pitchFamily="34" charset="-120"/>
-              </a:rPr>
-              <a:t>Ограничения: не увеличивает </a:t>
-            </a:r>
-            <a:r>
-              <a:rPr lang="en-US" sz="1600" dirty="0" err="1">
-                <a:solidFill>
-                  <a:srgbClr val="4A5566"/>
-                </a:solidFill>
-                <a:latin typeface="Cambria" panose="02040503050406030204" pitchFamily="18" charset="0"/>
-                <a:ea typeface="Cambria" panose="02040503050406030204" pitchFamily="18" charset="0"/>
-                <a:cs typeface="IBM Plex Sans" pitchFamily="34" charset="-120"/>
-              </a:rPr>
-              <a:t>доход</a:t>
-            </a:r>
-            <a:r>
-              <a:rPr lang="en-US" sz="1600" dirty="0">
-                <a:solidFill>
-                  <a:srgbClr val="4A5566"/>
-                </a:solidFill>
-                <a:latin typeface="Cambria" panose="02040503050406030204" pitchFamily="18" charset="0"/>
-                <a:ea typeface="Cambria" panose="02040503050406030204" pitchFamily="18" charset="0"/>
-                <a:cs typeface="IBM Plex Sans" pitchFamily="34" charset="-120"/>
-              </a:rPr>
-              <a:t>  заранее </a:t>
-            </a:r>
-            <a:r>
-              <a:rPr lang="en-US" sz="1600" dirty="0" err="1">
-                <a:solidFill>
-                  <a:srgbClr val="4A5566"/>
-                </a:solidFill>
-                <a:latin typeface="Cambria" panose="02040503050406030204" pitchFamily="18" charset="0"/>
-                <a:ea typeface="Cambria" panose="02040503050406030204" pitchFamily="18" charset="0"/>
-                <a:cs typeface="IBM Plex Sans" pitchFamily="34" charset="-120"/>
-              </a:rPr>
-              <a:t>показывает</a:t>
-            </a:r>
-            <a:r>
-              <a:rPr lang="en-US" sz="1600" dirty="0">
-                <a:solidFill>
-                  <a:srgbClr val="4A5566"/>
-                </a:solidFill>
-                <a:latin typeface="Cambria" panose="02040503050406030204" pitchFamily="18" charset="0"/>
-                <a:ea typeface="Cambria" panose="02040503050406030204" pitchFamily="18" charset="0"/>
-                <a:cs typeface="IBM Plex Sans" pitchFamily="34" charset="-120"/>
-              </a:rPr>
-              <a:t> </a:t>
-            </a:r>
-            <a:r>
-              <a:rPr lang="en-US" sz="1600" dirty="0" err="1">
-                <a:solidFill>
-                  <a:srgbClr val="4A5566"/>
-                </a:solidFill>
-                <a:latin typeface="Cambria" panose="02040503050406030204" pitchFamily="18" charset="0"/>
-                <a:ea typeface="Cambria" panose="02040503050406030204" pitchFamily="18" charset="0"/>
-                <a:cs typeface="IBM Plex Sans" pitchFamily="34" charset="-120"/>
-              </a:rPr>
-              <a:t>дефицит</a:t>
-            </a:r>
-            <a:r>
-              <a:rPr lang="ru-RU" sz="1600" dirty="0">
-                <a:solidFill>
-                  <a:srgbClr val="4A5566"/>
-                </a:solidFill>
-                <a:latin typeface="Cambria" panose="02040503050406030204" pitchFamily="18" charset="0"/>
-                <a:ea typeface="Cambria" panose="02040503050406030204" pitchFamily="18" charset="0"/>
-                <a:cs typeface="IBM Plex Sans" pitchFamily="34" charset="-120"/>
-              </a:rPr>
-              <a:t>,</a:t>
-            </a:r>
-            <a:r>
-              <a:rPr lang="en-US" sz="1600" dirty="0">
-                <a:solidFill>
-                  <a:srgbClr val="4A5566"/>
-                </a:solidFill>
-                <a:latin typeface="Cambria" panose="02040503050406030204" pitchFamily="18" charset="0"/>
-                <a:ea typeface="Cambria" panose="02040503050406030204" pitchFamily="18" charset="0"/>
-                <a:cs typeface="IBM Plex Sans" pitchFamily="34" charset="-120"/>
-              </a:rPr>
-              <a:t> работает на </a:t>
-            </a:r>
-            <a:r>
-              <a:rPr lang="en-US" sz="1600" dirty="0" err="1">
-                <a:solidFill>
-                  <a:srgbClr val="4A5566"/>
-                </a:solidFill>
-                <a:latin typeface="Cambria" panose="02040503050406030204" pitchFamily="18" charset="0"/>
-                <a:ea typeface="Cambria" panose="02040503050406030204" pitchFamily="18" charset="0"/>
-                <a:cs typeface="IBM Plex Sans" pitchFamily="34" charset="-120"/>
-              </a:rPr>
-              <a:t>синтетических</a:t>
-            </a:r>
-            <a:r>
-              <a:rPr lang="en-US" sz="1600" dirty="0">
-                <a:solidFill>
-                  <a:srgbClr val="4A5566"/>
-                </a:solidFill>
-                <a:latin typeface="Cambria" panose="02040503050406030204" pitchFamily="18" charset="0"/>
-                <a:ea typeface="Cambria" panose="02040503050406030204" pitchFamily="18" charset="0"/>
-                <a:cs typeface="IBM Plex Sans" pitchFamily="34" charset="-120"/>
-              </a:rPr>
-              <a:t> </a:t>
-            </a:r>
-            <a:r>
-              <a:rPr lang="en-US" sz="1600" dirty="0" err="1">
-                <a:solidFill>
-                  <a:srgbClr val="4A5566"/>
-                </a:solidFill>
-                <a:latin typeface="Cambria" panose="02040503050406030204" pitchFamily="18" charset="0"/>
-                <a:ea typeface="Cambria" panose="02040503050406030204" pitchFamily="18" charset="0"/>
-                <a:cs typeface="IBM Plex Sans" pitchFamily="34" charset="-120"/>
-              </a:rPr>
-              <a:t>данных</a:t>
-            </a:r>
-            <a:r>
-              <a:rPr lang="ru-RU" sz="1600" dirty="0">
-                <a:solidFill>
-                  <a:srgbClr val="4A5566"/>
-                </a:solidFill>
-                <a:latin typeface="Cambria" panose="02040503050406030204" pitchFamily="18" charset="0"/>
-                <a:ea typeface="Cambria" panose="02040503050406030204" pitchFamily="18" charset="0"/>
-                <a:cs typeface="IBM Plex Sans" pitchFamily="34" charset="-120"/>
-              </a:rPr>
-              <a:t>,</a:t>
-            </a:r>
-            <a:r>
-              <a:rPr lang="en-US" sz="1600" dirty="0">
-                <a:solidFill>
-                  <a:srgbClr val="4A5566"/>
-                </a:solidFill>
-                <a:latin typeface="Cambria" panose="02040503050406030204" pitchFamily="18" charset="0"/>
-                <a:ea typeface="Cambria" panose="02040503050406030204" pitchFamily="18" charset="0"/>
-                <a:cs typeface="IBM Plex Sans" pitchFamily="34" charset="-120"/>
-              </a:rPr>
-              <a:t> не даёт инвестиционных советов и не проводит операций.</a:t>
-            </a:r>
-            <a:endParaRPr lang="en-US" sz="1600" dirty="0">
-              <a:latin typeface="Cambria" panose="02040503050406030204" pitchFamily="18" charset="0"/>
-              <a:ea typeface="Cambria" panose="02040503050406030204" pitchFamily="18" charset="0"/>
-            </a:endParaRPr>
-          </a:p>
-        </p:txBody>
-      </p:sp>
-      <p:sp>
-        <p:nvSpPr>
-          <p:cNvPr id="8" name="Shape 6"/>
-          <p:cNvSpPr/>
-          <p:nvPr/>
-        </p:nvSpPr>
-        <p:spPr>
-          <a:xfrm>
-            <a:off x="7721811" y="1563369"/>
-            <a:ext cx="3652097" cy="3652097"/>
-          </a:xfrm>
-          <a:prstGeom prst="roundRect">
-            <a:avLst>
-              <a:gd name="adj" fmla="val 6425"/>
-            </a:avLst>
-          </a:prstGeom>
-          <a:solidFill>
-            <a:srgbClr val="FDFBF6"/>
-          </a:solidFill>
-          <a:ln w="12700">
-            <a:solidFill>
-              <a:srgbClr val="D9D2C3"/>
-            </a:solidFill>
-            <a:prstDash val="dash"/>
-          </a:ln>
-        </p:spPr>
-      </p:sp>
-      <p:sp>
-        <p:nvSpPr>
-          <p:cNvPr id="9" name="Text 7"/>
-          <p:cNvSpPr/>
-          <p:nvPr/>
-        </p:nvSpPr>
-        <p:spPr>
-          <a:xfrm>
-            <a:off x="8791574" y="3154680"/>
-            <a:ext cx="1512570" cy="274320"/>
-          </a:xfrm>
-          <a:prstGeom prst="rect">
-            <a:avLst/>
-          </a:prstGeom>
-          <a:noFill/>
-          <a:ln/>
-        </p:spPr>
-        <p:txBody>
-          <a:bodyPr wrap="square" lIns="0" tIns="0" rIns="0" bIns="0" rtlCol="0" anchor="t">
-            <a:normAutofit/>
-          </a:bodyPr>
-          <a:lstStyle/>
-          <a:p>
-            <a:pPr marL="0" indent="0" algn="ctr">
-              <a:lnSpc>
-                <a:spcPts val="1960"/>
-              </a:lnSpc>
-              <a:buNone/>
-            </a:pPr>
-            <a:r>
-              <a:rPr lang="en-US" sz="1400" dirty="0">
-                <a:solidFill>
-                  <a:srgbClr val="5F6877"/>
-                </a:solidFill>
-                <a:latin typeface="IBM Plex Sans" pitchFamily="34" charset="0"/>
-                <a:ea typeface="IBM Plex Sans" pitchFamily="34" charset="-122"/>
-                <a:cs typeface="IBM Plex Sans" pitchFamily="34" charset="-120"/>
-              </a:rPr>
-              <a:t>[QR-код на отчёт]</a:t>
-            </a:r>
-            <a:endParaRPr lang="en-US" sz="1400" dirty="0"/>
-          </a:p>
-        </p:txBody>
-      </p:sp>
-      <p:sp>
-        <p:nvSpPr>
-          <p:cNvPr id="10" name="Text 8"/>
-          <p:cNvSpPr/>
-          <p:nvPr/>
-        </p:nvSpPr>
-        <p:spPr>
-          <a:xfrm>
-            <a:off x="7803383" y="5425861"/>
-            <a:ext cx="3488952" cy="1213197"/>
-          </a:xfrm>
-          <a:prstGeom prst="rect">
-            <a:avLst/>
-          </a:prstGeom>
-          <a:noFill/>
-          <a:ln/>
-        </p:spPr>
-        <p:txBody>
-          <a:bodyPr wrap="square" lIns="0" tIns="0" rIns="0" bIns="0" rtlCol="0" anchor="t">
-            <a:normAutofit fontScale="92500"/>
-          </a:bodyPr>
-          <a:lstStyle/>
-          <a:p>
-            <a:pPr algn="ctr">
-              <a:lnSpc>
-                <a:spcPts val="1950"/>
-              </a:lnSpc>
-            </a:pPr>
-            <a:r>
-              <a:rPr lang="en-US" sz="1600" dirty="0">
-                <a:solidFill>
-                  <a:srgbClr val="4A5566"/>
-                </a:solidFill>
-                <a:latin typeface="Cambria" panose="02040503050406030204" pitchFamily="18" charset="0"/>
-                <a:ea typeface="Cambria" panose="02040503050406030204" pitchFamily="18" charset="0"/>
-                <a:cs typeface="IBM Plex Sans" pitchFamily="34" charset="-120"/>
-              </a:rPr>
-              <a:t>GitHub: </a:t>
-            </a:r>
-            <a:r>
-              <a:rPr lang="en-US" sz="1600" dirty="0">
-                <a:solidFill>
-                  <a:srgbClr val="4A5566"/>
-                </a:solidFill>
-                <a:latin typeface="Cambria" panose="02040503050406030204" pitchFamily="18" charset="0"/>
-                <a:ea typeface="Cambria" panose="02040503050406030204" pitchFamily="18" charset="0"/>
-                <a:cs typeface="IBM Plex Sans" pitchFamily="34" charset="-120"/>
-                <a:hlinkClick r:id="rId3"/>
-              </a:rPr>
-              <a:t>https://github.com/Tvorog108/Xakaton_27_09_27</a:t>
-            </a:r>
-            <a:endParaRPr lang="ru-RU" sz="1600" dirty="0">
-              <a:solidFill>
-                <a:srgbClr val="4A5566"/>
-              </a:solidFill>
-              <a:latin typeface="Cambria" panose="02040503050406030204" pitchFamily="18" charset="0"/>
-              <a:ea typeface="Cambria" panose="02040503050406030204" pitchFamily="18" charset="0"/>
-              <a:cs typeface="IBM Plex Sans" pitchFamily="34" charset="-120"/>
-            </a:endParaRPr>
-          </a:p>
-          <a:p>
-            <a:pPr algn="ctr">
-              <a:lnSpc>
-                <a:spcPts val="1950"/>
-              </a:lnSpc>
-            </a:pPr>
-            <a:r>
-              <a:rPr lang="en-US" sz="1600" dirty="0">
-                <a:solidFill>
-                  <a:srgbClr val="4A5566"/>
-                </a:solidFill>
-                <a:latin typeface="Cambria" panose="02040503050406030204" pitchFamily="18" charset="0"/>
-                <a:ea typeface="Cambria" panose="02040503050406030204" pitchFamily="18" charset="0"/>
-                <a:cs typeface="IBM Plex Sans" pitchFamily="34" charset="-120"/>
-              </a:rPr>
-              <a:t>Telegram </a:t>
-            </a:r>
-            <a:r>
-              <a:rPr lang="en-US" sz="1600" dirty="0" err="1">
-                <a:solidFill>
-                  <a:srgbClr val="4A5566"/>
-                </a:solidFill>
-                <a:latin typeface="Cambria" panose="02040503050406030204" pitchFamily="18" charset="0"/>
-                <a:ea typeface="Cambria" panose="02040503050406030204" pitchFamily="18" charset="0"/>
-                <a:cs typeface="IBM Plex Sans" pitchFamily="34" charset="-120"/>
-              </a:rPr>
-              <a:t>капитана</a:t>
-            </a:r>
-            <a:r>
-              <a:rPr lang="en-US" sz="1600" dirty="0">
-                <a:solidFill>
-                  <a:srgbClr val="4A5566"/>
-                </a:solidFill>
-                <a:latin typeface="Cambria" panose="02040503050406030204" pitchFamily="18" charset="0"/>
-                <a:ea typeface="Cambria" panose="02040503050406030204" pitchFamily="18" charset="0"/>
-                <a:cs typeface="IBM Plex Sans" pitchFamily="34" charset="-120"/>
-              </a:rPr>
-              <a:t>: @SergeevBogdan123</a:t>
-            </a:r>
-            <a:endParaRPr lang="en-US" sz="1600" dirty="0">
-              <a:latin typeface="Cambria" panose="02040503050406030204" pitchFamily="18" charset="0"/>
-              <a:ea typeface="Cambria" panose="02040503050406030204" pitchFamily="18" charset="0"/>
-            </a:endParaRPr>
-          </a:p>
-        </p:txBody>
-      </p:sp>
-      <p:pic>
-        <p:nvPicPr>
-          <p:cNvPr id="12" name="Рисунок 11">
-            <a:extLst>
-              <a:ext uri="{FF2B5EF4-FFF2-40B4-BE49-F238E27FC236}">
-                <a16:creationId xmlns:a16="http://schemas.microsoft.com/office/drawing/2014/main" id="{2E2BEC40-2321-4F0F-B62C-7E6BDB686B05}"/>
-              </a:ext>
-            </a:extLst>
-          </p:cNvPr>
-          <p:cNvPicPr>
-            <a:picLocks noChangeAspect="1"/>
-          </p:cNvPicPr>
-          <p:nvPr/>
-        </p:nvPicPr>
-        <p:blipFill>
-          <a:blip r:embed="rId4"/>
-          <a:stretch>
-            <a:fillRect/>
-          </a:stretch>
-        </p:blipFill>
-        <p:spPr>
-          <a:xfrm>
-            <a:off x="7721811" y="1395305"/>
-            <a:ext cx="3793067" cy="3899325"/>
-          </a:xfrm>
-          <a:prstGeom prst="rect">
-            <a:avLst/>
-          </a:prstGeom>
-        </p:spPr>
-      </p:pic>
     </p:spTree>
   </p:cSld>
   <p:clrMapOvr>
